--- a/docs/Final Presentation.pptx
+++ b/docs/Final Presentation.pptx
@@ -17,13 +17,13 @@
     <p:sldId id="262" r:id="rId8"/>
     <p:sldId id="263" r:id="rId9"/>
     <p:sldId id="264" r:id="rId10"/>
-    <p:sldId id="265" r:id="rId11"/>
-    <p:sldId id="266" r:id="rId12"/>
-    <p:sldId id="267" r:id="rId13"/>
-    <p:sldId id="268" r:id="rId14"/>
-    <p:sldId id="269" r:id="rId15"/>
-    <p:sldId id="270" r:id="rId16"/>
-    <p:sldId id="271" r:id="rId17"/>
+    <p:sldId id="269" r:id="rId11"/>
+    <p:sldId id="270" r:id="rId12"/>
+    <p:sldId id="271" r:id="rId13"/>
+    <p:sldId id="265" r:id="rId14"/>
+    <p:sldId id="266" r:id="rId15"/>
+    <p:sldId id="267" r:id="rId16"/>
+    <p:sldId id="268" r:id="rId17"/>
     <p:sldId id="272" r:id="rId18"/>
     <p:sldId id="273" r:id="rId19"/>
     <p:sldId id="274" r:id="rId20"/>
@@ -2292,7 +2292,7 @@
           </a:prstGeom>
           <a:extLst>
             <a:ext uri="{C572A759-6A51-4108-AA02-DFA0A04FC94B}">
-              <ma14:wrappingTextBoxFlag xmlns:ma14="http://schemas.microsoft.com/office/mac/drawingml/2011/main" xmlns="" val="0"/>
+              <ma14:wrappingTextBoxFlag xmlns="" xmlns:ma14="http://schemas.microsoft.com/office/mac/drawingml/2011/main" val="0"/>
             </a:ext>
           </a:extLst>
         </p:spPr>
@@ -2447,7 +2447,7 @@
           </a:prstGeom>
           <a:extLst>
             <a:ext uri="{C572A759-6A51-4108-AA02-DFA0A04FC94B}">
-              <ma14:wrappingTextBoxFlag xmlns:ma14="http://schemas.microsoft.com/office/mac/drawingml/2011/main" xmlns="" val="0"/>
+              <ma14:wrappingTextBoxFlag xmlns="" xmlns:ma14="http://schemas.microsoft.com/office/mac/drawingml/2011/main" val="0"/>
             </a:ext>
           </a:extLst>
         </p:spPr>
@@ -2522,7 +2522,7 @@
           </a:prstGeom>
           <a:extLst>
             <a:ext uri="{C572A759-6A51-4108-AA02-DFA0A04FC94B}">
-              <ma14:wrappingTextBoxFlag xmlns:ma14="http://schemas.microsoft.com/office/mac/drawingml/2011/main" xmlns="" val="0"/>
+              <ma14:wrappingTextBoxFlag xmlns="" xmlns:ma14="http://schemas.microsoft.com/office/mac/drawingml/2011/main" val="0"/>
             </a:ext>
           </a:extLst>
         </p:spPr>
@@ -3060,6 +3060,1633 @@
 
 <file path=ppt/slides/slide10.xml><?xml version="1.0" encoding="utf-8"?>
 <p:sld xmlns:a="http://schemas.openxmlformats.org/drawingml/2006/main" xmlns:r="http://schemas.openxmlformats.org/officeDocument/2006/relationships" xmlns:p="http://schemas.openxmlformats.org/presentationml/2006/main">
+  <p:cSld name="Slide 14">
+    <p:spTree>
+      <p:nvGrpSpPr>
+        <p:cNvPr id="1" name=""/>
+        <p:cNvGrpSpPr/>
+        <p:nvPr/>
+      </p:nvGrpSpPr>
+      <p:grpSpPr>
+        <a:xfrm>
+          <a:off x="0" y="0"/>
+          <a:ext cx="0" cy="0"/>
+          <a:chOff x="0" y="0"/>
+          <a:chExt cx="0" cy="0"/>
+        </a:xfrm>
+      </p:grpSpPr>
+      <p:sp>
+        <p:nvSpPr>
+          <p:cNvPr id="2" name="Text 0"/>
+          <p:cNvSpPr>
+            <a:spLocks noGrp="1"/>
+          </p:cNvSpPr>
+          <p:nvPr>
+            <p:ph type="title" idx="100" hasCustomPrompt="1"/>
+          </p:nvPr>
+        </p:nvSpPr>
+        <p:spPr>
+          <a:xfrm>
+            <a:off x="548640" y="365760"/>
+            <a:ext cx="11094415" cy="777240"/>
+          </a:xfrm>
+          <a:prstGeom prst="rect">
+            <a:avLst/>
+          </a:prstGeom>
+          <a:noFill/>
+          <a:ln/>
+        </p:spPr>
+        <p:txBody>
+          <a:bodyPr wrap="square" lIns="0" tIns="0" rIns="0" bIns="0" rtlCol="0" anchor="ctr"/>
+          <a:lstStyle/>
+          <a:p>
+            <a:pPr marL="0" indent="0" algn="l">
+              <a:buNone/>
+            </a:pPr>
+            <a:r>
+              <a:rPr lang="en-US" sz="3400" b="1" dirty="0">
+                <a:solidFill>
+                  <a:schemeClr val="tx2"/>
+                </a:solidFill>
+              </a:rPr>
+              <a:t>Live Demonstration: Client</a:t>
+            </a:r>
+            <a:endParaRPr lang="en-US" sz="3400" dirty="0"/>
+          </a:p>
+        </p:txBody>
+      </p:sp>
+      <p:sp>
+        <p:nvSpPr>
+          <p:cNvPr id="3" name="Client workflow card"/>
+          <p:cNvSpPr/>
+          <p:nvPr/>
+        </p:nvSpPr>
+        <p:spPr>
+          <a:xfrm>
+            <a:off x="548640" y="1371600"/>
+            <a:ext cx="4023360" cy="4892040"/>
+          </a:xfrm>
+          <a:prstGeom prst="roundRect">
+            <a:avLst>
+              <a:gd name="adj" fmla="val 2273"/>
+            </a:avLst>
+          </a:prstGeom>
+          <a:solidFill>
+            <a:schemeClr val="bg1"/>
+          </a:solidFill>
+          <a:ln/>
+          <a:effectLst>
+            <a:outerShdw blurRad="127000" dist="25400" dir="5400000" algn="bl" rotWithShape="0">
+              <a:srgbClr val="0B1F33">
+                <a:alpha val="10000"/>
+              </a:srgbClr>
+            </a:outerShdw>
+          </a:effectLst>
+        </p:spPr>
+        <p:txBody>
+          <a:bodyPr/>
+          <a:lstStyle/>
+          <a:p>
+            <a:endParaRPr lang="en-AU"/>
+          </a:p>
+        </p:txBody>
+      </p:sp>
+      <p:sp>
+        <p:nvSpPr>
+          <p:cNvPr id="4" name="Client workflow badge"/>
+          <p:cNvSpPr/>
+          <p:nvPr/>
+        </p:nvSpPr>
+        <p:spPr>
+          <a:xfrm>
+            <a:off x="822960" y="1554480"/>
+            <a:ext cx="502920" cy="502920"/>
+          </a:xfrm>
+          <a:prstGeom prst="ellipse">
+            <a:avLst/>
+          </a:prstGeom>
+          <a:solidFill>
+            <a:schemeClr val="accent1"/>
+          </a:solidFill>
+          <a:ln/>
+        </p:spPr>
+        <p:txBody>
+          <a:bodyPr/>
+          <a:lstStyle/>
+          <a:p>
+            <a:endParaRPr lang="en-AU"/>
+          </a:p>
+        </p:txBody>
+      </p:sp>
+      <p:pic>
+        <p:nvPicPr>
+          <p:cNvPr id="5" name="Client workflow icon" descr="Client workflow"/>
+          <p:cNvPicPr>
+            <a:picLocks noChangeAspect="1"/>
+          </p:cNvPicPr>
+          <p:nvPr/>
+        </p:nvPicPr>
+        <p:blipFill>
+          <a:blip r:embed="rId3"/>
+          <a:stretch>
+            <a:fillRect/>
+          </a:stretch>
+        </p:blipFill>
+        <p:spPr>
+          <a:xfrm>
+            <a:off x="958748" y="1690268"/>
+            <a:ext cx="231343" cy="231343"/>
+          </a:xfrm>
+          <a:prstGeom prst="rect">
+            <a:avLst/>
+          </a:prstGeom>
+        </p:spPr>
+      </p:pic>
+      <p:sp>
+        <p:nvSpPr>
+          <p:cNvPr id="6" name="Client workflow heading"/>
+          <p:cNvSpPr txBox="1"/>
+          <p:nvPr/>
+        </p:nvSpPr>
+        <p:spPr>
+          <a:xfrm>
+            <a:off x="1508760" y="1554480"/>
+            <a:ext cx="4206240" cy="502920"/>
+          </a:xfrm>
+          <a:prstGeom prst="rect">
+            <a:avLst/>
+          </a:prstGeom>
+          <a:noFill/>
+          <a:ln/>
+        </p:spPr>
+        <p:txBody>
+          <a:bodyPr wrap="square" lIns="0" tIns="0" rIns="0" bIns="0" rtlCol="0" anchor="ctr"/>
+          <a:lstStyle/>
+          <a:p>
+            <a:pPr marL="0" indent="0">
+              <a:buNone/>
+            </a:pPr>
+            <a:r>
+              <a:rPr lang="en-US" sz="2000" b="1" dirty="0">
+                <a:solidFill>
+                  <a:schemeClr val="tx2"/>
+                </a:solidFill>
+              </a:rPr>
+              <a:t>Client Workflow</a:t>
+            </a:r>
+            <a:endParaRPr lang="en-US" sz="2000" dirty="0"/>
+          </a:p>
+        </p:txBody>
+      </p:sp>
+      <p:sp>
+        <p:nvSpPr>
+          <p:cNvPr id="7" name="Text 4"/>
+          <p:cNvSpPr txBox="1"/>
+          <p:nvPr/>
+        </p:nvSpPr>
+        <p:spPr>
+          <a:xfrm>
+            <a:off x="822960" y="2286000"/>
+            <a:ext cx="3474720" cy="502920"/>
+          </a:xfrm>
+          <a:prstGeom prst="rect">
+            <a:avLst/>
+          </a:prstGeom>
+          <a:noFill/>
+          <a:ln/>
+        </p:spPr>
+        <p:txBody>
+          <a:bodyPr wrap="square" lIns="0" tIns="0" rIns="0" bIns="0" rtlCol="0" anchor="t"/>
+          <a:lstStyle/>
+          <a:p>
+            <a:pPr marL="0" indent="0">
+              <a:buNone/>
+            </a:pPr>
+            <a:r>
+              <a:rPr lang="en-US" sz="1600" dirty="0">
+                <a:solidFill>
+                  <a:schemeClr val="tx1"/>
+                </a:solidFill>
+              </a:rPr>
+              <a:t>During the live demonstration we will show:</a:t>
+            </a:r>
+            <a:endParaRPr lang="en-US" sz="1600" dirty="0"/>
+          </a:p>
+        </p:txBody>
+      </p:sp>
+      <p:sp>
+        <p:nvSpPr>
+          <p:cNvPr id="8" name="Text 5"/>
+          <p:cNvSpPr txBox="1"/>
+          <p:nvPr/>
+        </p:nvSpPr>
+        <p:spPr>
+          <a:xfrm>
+            <a:off x="822960" y="2880360"/>
+            <a:ext cx="3474720" cy="3200400"/>
+          </a:xfrm>
+          <a:prstGeom prst="rect">
+            <a:avLst/>
+          </a:prstGeom>
+          <a:noFill/>
+          <a:ln/>
+        </p:spPr>
+        <p:txBody>
+          <a:bodyPr wrap="square" lIns="0" tIns="0" rIns="0" bIns="0" rtlCol="0" anchor="t"/>
+          <a:lstStyle/>
+          <a:p>
+            <a:pPr marL="203200" indent="-203200">
+              <a:spcAft>
+                <a:spcPts val="600"/>
+              </a:spcAft>
+              <a:buSzPct val="100000"/>
+              <a:buChar char="•"/>
+            </a:pPr>
+            <a:r>
+              <a:rPr lang="en-US" sz="1600" dirty="0">
+                <a:solidFill>
+                  <a:schemeClr val="tx1"/>
+                </a:solidFill>
+              </a:rPr>
+              <a:t>Client registration/login</a:t>
+            </a:r>
+            <a:endParaRPr lang="en-US" sz="1600" dirty="0"/>
+          </a:p>
+          <a:p>
+            <a:pPr marL="203200" indent="-203200">
+              <a:spcAft>
+                <a:spcPts val="600"/>
+              </a:spcAft>
+              <a:buSzPct val="100000"/>
+              <a:buChar char="•"/>
+            </a:pPr>
+            <a:r>
+              <a:rPr lang="en-US" sz="1600" dirty="0">
+                <a:solidFill>
+                  <a:schemeClr val="tx1"/>
+                </a:solidFill>
+              </a:rPr>
+              <a:t>AI-assisted chat</a:t>
+            </a:r>
+            <a:endParaRPr lang="en-US" sz="1600" dirty="0"/>
+          </a:p>
+          <a:p>
+            <a:pPr marL="203200" indent="-203200">
+              <a:spcAft>
+                <a:spcPts val="600"/>
+              </a:spcAft>
+              <a:buSzPct val="100000"/>
+              <a:buChar char="•"/>
+            </a:pPr>
+            <a:r>
+              <a:rPr lang="en-US" sz="1600" dirty="0">
+                <a:solidFill>
+                  <a:schemeClr val="tx1"/>
+                </a:solidFill>
+              </a:rPr>
+              <a:t>AI response</a:t>
+            </a:r>
+            <a:endParaRPr lang="en-US" sz="1600" dirty="0"/>
+          </a:p>
+          <a:p>
+            <a:pPr marL="203200" indent="-203200">
+              <a:spcAft>
+                <a:spcPts val="600"/>
+              </a:spcAft>
+              <a:buSzPct val="100000"/>
+              <a:buChar char="•"/>
+            </a:pPr>
+            <a:r>
+              <a:rPr lang="en-US" sz="1600" dirty="0">
+                <a:solidFill>
+                  <a:schemeClr val="tx1"/>
+                </a:solidFill>
+              </a:rPr>
+              <a:t>Ticket creation/escalation</a:t>
+            </a:r>
+            <a:endParaRPr lang="en-US" sz="1600" dirty="0"/>
+          </a:p>
+          <a:p>
+            <a:pPr marL="203200" indent="-203200">
+              <a:spcAft>
+                <a:spcPts val="600"/>
+              </a:spcAft>
+              <a:buSzPct val="100000"/>
+              <a:buChar char="•"/>
+            </a:pPr>
+            <a:r>
+              <a:rPr lang="en-US" sz="1600" dirty="0">
+                <a:solidFill>
+                  <a:schemeClr val="tx1"/>
+                </a:solidFill>
+              </a:rPr>
+              <a:t>Customer ticket list</a:t>
+            </a:r>
+            <a:endParaRPr lang="en-US" sz="1600" dirty="0"/>
+          </a:p>
+          <a:p>
+            <a:pPr marL="203200" indent="-203200">
+              <a:spcAft>
+                <a:spcPts val="600"/>
+              </a:spcAft>
+              <a:buSzPct val="100000"/>
+              <a:buChar char="•"/>
+            </a:pPr>
+            <a:r>
+              <a:rPr lang="en-US" sz="1600" dirty="0">
+                <a:solidFill>
+                  <a:schemeClr val="tx1"/>
+                </a:solidFill>
+              </a:rPr>
+              <a:t>Ticket details/status</a:t>
+            </a:r>
+            <a:endParaRPr lang="en-US" sz="1600" dirty="0"/>
+          </a:p>
+          <a:p>
+            <a:pPr marL="203200" indent="-203200">
+              <a:spcAft>
+                <a:spcPts val="600"/>
+              </a:spcAft>
+              <a:buSzPct val="100000"/>
+              <a:buChar char="•"/>
+            </a:pPr>
+            <a:r>
+              <a:rPr lang="en-US" sz="1600" dirty="0">
+                <a:solidFill>
+                  <a:schemeClr val="tx1"/>
+                </a:solidFill>
+              </a:rPr>
+              <a:t>Conversation history</a:t>
+            </a:r>
+            <a:endParaRPr lang="en-US" sz="1600" dirty="0"/>
+          </a:p>
+          <a:p>
+            <a:pPr marL="203200" indent="-203200">
+              <a:spcAft>
+                <a:spcPts val="600"/>
+              </a:spcAft>
+              <a:buSzPct val="100000"/>
+              <a:buChar char="•"/>
+            </a:pPr>
+            <a:r>
+              <a:rPr lang="en-US" sz="1600" dirty="0">
+                <a:solidFill>
+                  <a:schemeClr val="tx1"/>
+                </a:solidFill>
+              </a:rPr>
+              <a:t>Agent response visible to the customer</a:t>
+            </a:r>
+            <a:endParaRPr lang="en-US" sz="1600" dirty="0"/>
+          </a:p>
+        </p:txBody>
+      </p:sp>
+      <p:sp>
+        <p:nvSpPr>
+          <p:cNvPr id="25" name="Slide Number Placeholder 0"/>
+          <p:cNvSpPr>
+            <a:spLocks noGrp="1"/>
+          </p:cNvSpPr>
+          <p:nvPr>
+            <p:ph type="sldNum" sz="quarter" idx="4294967295"/>
+          </p:nvPr>
+        </p:nvSpPr>
+        <p:spPr>
+          <a:xfrm>
+            <a:off x="10972800" y="6446520"/>
+            <a:ext cx="667512" cy="256032"/>
+          </a:xfrm>
+          <a:prstGeom prst="rect">
+            <a:avLst/>
+          </a:prstGeom>
+          <a:extLst>
+            <a:ext uri="{C572A759-6A51-4108-AA02-DFA0A04FC94B}">
+              <ma14:wrappingTextBoxFlag xmlns="" xmlns:ma14="http://schemas.microsoft.com/office/mac/drawingml/2011/main" val="0"/>
+            </a:ext>
+          </a:extLst>
+        </p:spPr>
+        <p:txBody>
+          <a:bodyPr/>
+          <a:lstStyle>
+            <a:lvl1pPr>
+              <a:defRPr sz="1000">
+                <a:solidFill>
+                  <a:schemeClr val="accent6"/>
+                </a:solidFill>
+              </a:defRPr>
+            </a:lvl1pPr>
+          </a:lstStyle>
+          <a:p>
+            <a:pPr algn="r"/>
+            <a:fld id="{F7021451-1387-4CA6-816F-3879F97B5CBC}" type="slidenum">
+              <a:rPr lang="en-US" b="0"/>
+              <a:t>10</a:t>
+            </a:fld>
+            <a:endParaRPr lang="en-US"/>
+          </a:p>
+        </p:txBody>
+      </p:sp>
+      <p:pic>
+        <p:nvPicPr>
+          <p:cNvPr id="11" name="Content Placeholder 5">
+            <a:extLst>
+              <a:ext uri="{FF2B5EF4-FFF2-40B4-BE49-F238E27FC236}">
+                <a16:creationId xmlns:a16="http://schemas.microsoft.com/office/drawing/2014/main" id="{6BEB5E5A-5BB7-E9FF-1FEA-9B4E72B9C84A}"/>
+              </a:ext>
+            </a:extLst>
+          </p:cNvPr>
+          <p:cNvPicPr>
+            <a:picLocks noChangeAspect="1"/>
+          </p:cNvPicPr>
+          <p:nvPr/>
+        </p:nvPicPr>
+        <p:blipFill>
+          <a:blip r:embed="rId4"/>
+          <a:stretch>
+            <a:fillRect/>
+          </a:stretch>
+        </p:blipFill>
+        <p:spPr>
+          <a:xfrm>
+            <a:off x="4846320" y="1371600"/>
+            <a:ext cx="7142922" cy="4590842"/>
+          </a:xfrm>
+          <a:prstGeom prst="rect">
+            <a:avLst/>
+          </a:prstGeom>
+        </p:spPr>
+      </p:pic>
+    </p:spTree>
+  </p:cSld>
+  <p:clrMapOvr>
+    <a:masterClrMapping/>
+  </p:clrMapOvr>
+</p:sld>
+</file>
+
+<file path=ppt/slides/slide11.xml><?xml version="1.0" encoding="utf-8"?>
+<p:sld xmlns:a="http://schemas.openxmlformats.org/drawingml/2006/main" xmlns:r="http://schemas.openxmlformats.org/officeDocument/2006/relationships" xmlns:p="http://schemas.openxmlformats.org/presentationml/2006/main">
+  <p:cSld name="Slide 15">
+    <p:spTree>
+      <p:nvGrpSpPr>
+        <p:cNvPr id="1" name=""/>
+        <p:cNvGrpSpPr/>
+        <p:nvPr/>
+      </p:nvGrpSpPr>
+      <p:grpSpPr>
+        <a:xfrm>
+          <a:off x="0" y="0"/>
+          <a:ext cx="0" cy="0"/>
+          <a:chOff x="0" y="0"/>
+          <a:chExt cx="0" cy="0"/>
+        </a:xfrm>
+      </p:grpSpPr>
+      <p:sp>
+        <p:nvSpPr>
+          <p:cNvPr id="2" name="Text 0"/>
+          <p:cNvSpPr>
+            <a:spLocks noGrp="1"/>
+          </p:cNvSpPr>
+          <p:nvPr>
+            <p:ph type="title" idx="100" hasCustomPrompt="1"/>
+          </p:nvPr>
+        </p:nvSpPr>
+        <p:spPr>
+          <a:xfrm>
+            <a:off x="548640" y="365760"/>
+            <a:ext cx="11094415" cy="777240"/>
+          </a:xfrm>
+          <a:prstGeom prst="rect">
+            <a:avLst/>
+          </a:prstGeom>
+          <a:noFill/>
+          <a:ln/>
+        </p:spPr>
+        <p:txBody>
+          <a:bodyPr wrap="square" lIns="0" tIns="0" rIns="0" bIns="0" rtlCol="0" anchor="ctr"/>
+          <a:lstStyle/>
+          <a:p>
+            <a:pPr marL="0" indent="0" algn="l">
+              <a:buNone/>
+            </a:pPr>
+            <a:r>
+              <a:rPr lang="en-US" sz="3400" b="1" dirty="0">
+                <a:solidFill>
+                  <a:schemeClr val="tx2"/>
+                </a:solidFill>
+              </a:rPr>
+              <a:t>Live Demonstration: Support Agent</a:t>
+            </a:r>
+            <a:endParaRPr lang="en-US" sz="3400" dirty="0"/>
+          </a:p>
+        </p:txBody>
+      </p:sp>
+      <p:sp>
+        <p:nvSpPr>
+          <p:cNvPr id="5" name="Agent workflow card"/>
+          <p:cNvSpPr/>
+          <p:nvPr/>
+        </p:nvSpPr>
+        <p:spPr>
+          <a:xfrm>
+            <a:off x="7616952" y="1371600"/>
+            <a:ext cx="4023360" cy="4892040"/>
+          </a:xfrm>
+          <a:prstGeom prst="roundRect">
+            <a:avLst>
+              <a:gd name="adj" fmla="val 2273"/>
+            </a:avLst>
+          </a:prstGeom>
+          <a:solidFill>
+            <a:schemeClr val="bg1"/>
+          </a:solidFill>
+          <a:ln/>
+          <a:effectLst>
+            <a:outerShdw blurRad="127000" dist="25400" dir="5400000" algn="bl" rotWithShape="0">
+              <a:srgbClr val="0B1F33">
+                <a:alpha val="10000"/>
+              </a:srgbClr>
+            </a:outerShdw>
+          </a:effectLst>
+        </p:spPr>
+        <p:txBody>
+          <a:bodyPr/>
+          <a:lstStyle/>
+          <a:p>
+            <a:endParaRPr lang="en-AU"/>
+          </a:p>
+        </p:txBody>
+      </p:sp>
+      <p:sp>
+        <p:nvSpPr>
+          <p:cNvPr id="6" name="Agent workflow badge"/>
+          <p:cNvSpPr/>
+          <p:nvPr/>
+        </p:nvSpPr>
+        <p:spPr>
+          <a:xfrm>
+            <a:off x="7891272" y="1554480"/>
+            <a:ext cx="502920" cy="502920"/>
+          </a:xfrm>
+          <a:prstGeom prst="ellipse">
+            <a:avLst/>
+          </a:prstGeom>
+          <a:solidFill>
+            <a:schemeClr val="accent3"/>
+          </a:solidFill>
+          <a:ln/>
+        </p:spPr>
+        <p:txBody>
+          <a:bodyPr/>
+          <a:lstStyle/>
+          <a:p>
+            <a:endParaRPr lang="en-AU"/>
+          </a:p>
+        </p:txBody>
+      </p:sp>
+      <p:pic>
+        <p:nvPicPr>
+          <p:cNvPr id="7" name="Agent workflow icon" descr="Agent workflow"/>
+          <p:cNvPicPr>
+            <a:picLocks noChangeAspect="1"/>
+          </p:cNvPicPr>
+          <p:nvPr/>
+        </p:nvPicPr>
+        <p:blipFill>
+          <a:blip r:embed="rId3"/>
+          <a:stretch>
+            <a:fillRect/>
+          </a:stretch>
+        </p:blipFill>
+        <p:spPr>
+          <a:xfrm>
+            <a:off x="8027060" y="1690268"/>
+            <a:ext cx="231343" cy="231343"/>
+          </a:xfrm>
+          <a:prstGeom prst="rect">
+            <a:avLst/>
+          </a:prstGeom>
+        </p:spPr>
+      </p:pic>
+      <p:sp>
+        <p:nvSpPr>
+          <p:cNvPr id="8" name="Agent workflow heading"/>
+          <p:cNvSpPr txBox="1"/>
+          <p:nvPr/>
+        </p:nvSpPr>
+        <p:spPr>
+          <a:xfrm>
+            <a:off x="8577072" y="1554480"/>
+            <a:ext cx="4206240" cy="502920"/>
+          </a:xfrm>
+          <a:prstGeom prst="rect">
+            <a:avLst/>
+          </a:prstGeom>
+          <a:noFill/>
+          <a:ln/>
+        </p:spPr>
+        <p:txBody>
+          <a:bodyPr wrap="square" lIns="0" tIns="0" rIns="0" bIns="0" rtlCol="0" anchor="ctr"/>
+          <a:lstStyle/>
+          <a:p>
+            <a:pPr marL="0" indent="0">
+              <a:buNone/>
+            </a:pPr>
+            <a:r>
+              <a:rPr lang="en-US" sz="2000" b="1" dirty="0">
+                <a:solidFill>
+                  <a:schemeClr val="tx2"/>
+                </a:solidFill>
+              </a:rPr>
+              <a:t>Agent Workflow</a:t>
+            </a:r>
+            <a:endParaRPr lang="en-US" sz="2000" dirty="0"/>
+          </a:p>
+        </p:txBody>
+      </p:sp>
+      <p:sp>
+        <p:nvSpPr>
+          <p:cNvPr id="9" name="Text 5"/>
+          <p:cNvSpPr txBox="1"/>
+          <p:nvPr/>
+        </p:nvSpPr>
+        <p:spPr>
+          <a:xfrm>
+            <a:off x="7891272" y="2286000"/>
+            <a:ext cx="3474720" cy="502920"/>
+          </a:xfrm>
+          <a:prstGeom prst="rect">
+            <a:avLst/>
+          </a:prstGeom>
+          <a:noFill/>
+          <a:ln/>
+        </p:spPr>
+        <p:txBody>
+          <a:bodyPr wrap="square" lIns="0" tIns="0" rIns="0" bIns="0" rtlCol="0" anchor="t"/>
+          <a:lstStyle/>
+          <a:p>
+            <a:pPr marL="0" indent="0">
+              <a:buNone/>
+            </a:pPr>
+            <a:r>
+              <a:rPr lang="en-US" sz="1600" dirty="0">
+                <a:solidFill>
+                  <a:schemeClr val="tx1"/>
+                </a:solidFill>
+              </a:rPr>
+              <a:t>After the customer issue is escalated:</a:t>
+            </a:r>
+            <a:endParaRPr lang="en-US" sz="1600" dirty="0"/>
+          </a:p>
+        </p:txBody>
+      </p:sp>
+      <p:sp>
+        <p:nvSpPr>
+          <p:cNvPr id="10" name="Text 6"/>
+          <p:cNvSpPr txBox="1"/>
+          <p:nvPr/>
+        </p:nvSpPr>
+        <p:spPr>
+          <a:xfrm>
+            <a:off x="7891272" y="2880360"/>
+            <a:ext cx="3474720" cy="3200400"/>
+          </a:xfrm>
+          <a:prstGeom prst="rect">
+            <a:avLst/>
+          </a:prstGeom>
+          <a:noFill/>
+          <a:ln/>
+        </p:spPr>
+        <p:txBody>
+          <a:bodyPr wrap="square" lIns="0" tIns="0" rIns="0" bIns="0" rtlCol="0" anchor="t"/>
+          <a:lstStyle/>
+          <a:p>
+            <a:pPr marL="203200" indent="-203200">
+              <a:spcAft>
+                <a:spcPts val="600"/>
+              </a:spcAft>
+              <a:buSzPct val="100000"/>
+              <a:buChar char="•"/>
+            </a:pPr>
+            <a:r>
+              <a:rPr lang="en-US" sz="1600" dirty="0">
+                <a:solidFill>
+                  <a:schemeClr val="tx1"/>
+                </a:solidFill>
+              </a:rPr>
+              <a:t>Agent logs in</a:t>
+            </a:r>
+            <a:endParaRPr lang="en-US" sz="1600" dirty="0"/>
+          </a:p>
+          <a:p>
+            <a:pPr marL="203200" indent="-203200">
+              <a:spcAft>
+                <a:spcPts val="600"/>
+              </a:spcAft>
+              <a:buSzPct val="100000"/>
+              <a:buChar char="•"/>
+            </a:pPr>
+            <a:r>
+              <a:rPr lang="en-US" sz="1600" dirty="0">
+                <a:solidFill>
+                  <a:schemeClr val="tx1"/>
+                </a:solidFill>
+              </a:rPr>
+              <a:t>Opens escalated ticket queue</a:t>
+            </a:r>
+            <a:endParaRPr lang="en-US" sz="1600" dirty="0"/>
+          </a:p>
+          <a:p>
+            <a:pPr marL="203200" indent="-203200">
+              <a:spcAft>
+                <a:spcPts val="600"/>
+              </a:spcAft>
+              <a:buSzPct val="100000"/>
+              <a:buChar char="•"/>
+            </a:pPr>
+            <a:r>
+              <a:rPr lang="en-US" sz="1600" dirty="0">
+                <a:solidFill>
+                  <a:schemeClr val="tx1"/>
+                </a:solidFill>
+              </a:rPr>
+              <a:t>Reviews ticket details</a:t>
+            </a:r>
+            <a:endParaRPr lang="en-US" sz="1600" dirty="0"/>
+          </a:p>
+          <a:p>
+            <a:pPr marL="203200" indent="-203200">
+              <a:spcAft>
+                <a:spcPts val="600"/>
+              </a:spcAft>
+              <a:buSzPct val="100000"/>
+              <a:buChar char="•"/>
+            </a:pPr>
+            <a:r>
+              <a:rPr lang="en-US" sz="1600" dirty="0">
+                <a:solidFill>
+                  <a:schemeClr val="tx1"/>
+                </a:solidFill>
+              </a:rPr>
+              <a:t>Reviews customer conversation</a:t>
+            </a:r>
+            <a:endParaRPr lang="en-US" sz="1600" dirty="0"/>
+          </a:p>
+          <a:p>
+            <a:pPr marL="203200" indent="-203200">
+              <a:spcAft>
+                <a:spcPts val="600"/>
+              </a:spcAft>
+              <a:buSzPct val="100000"/>
+              <a:buChar char="•"/>
+            </a:pPr>
+            <a:r>
+              <a:rPr lang="en-US" sz="1600" dirty="0">
+                <a:solidFill>
+                  <a:schemeClr val="tx1"/>
+                </a:solidFill>
+              </a:rPr>
+              <a:t>Assigns the ticket</a:t>
+            </a:r>
+            <a:endParaRPr lang="en-US" sz="1600" dirty="0"/>
+          </a:p>
+          <a:p>
+            <a:pPr marL="203200" indent="-203200">
+              <a:spcAft>
+                <a:spcPts val="600"/>
+              </a:spcAft>
+              <a:buSzPct val="100000"/>
+              <a:buChar char="•"/>
+            </a:pPr>
+            <a:r>
+              <a:rPr lang="en-US" sz="1600" dirty="0">
+                <a:solidFill>
+                  <a:schemeClr val="tx1"/>
+                </a:solidFill>
+              </a:rPr>
+              <a:t>Responds to the customer</a:t>
+            </a:r>
+            <a:endParaRPr lang="en-US" sz="1600" dirty="0"/>
+          </a:p>
+          <a:p>
+            <a:pPr marL="203200" indent="-203200">
+              <a:spcAft>
+                <a:spcPts val="600"/>
+              </a:spcAft>
+              <a:buSzPct val="100000"/>
+              <a:buChar char="•"/>
+            </a:pPr>
+            <a:r>
+              <a:rPr lang="en-US" sz="1600" dirty="0">
+                <a:solidFill>
+                  <a:schemeClr val="tx1"/>
+                </a:solidFill>
+              </a:rPr>
+              <a:t>Updates ticket status</a:t>
+            </a:r>
+            <a:endParaRPr lang="en-US" sz="1600" dirty="0"/>
+          </a:p>
+          <a:p>
+            <a:pPr marL="203200" indent="-203200">
+              <a:spcAft>
+                <a:spcPts val="600"/>
+              </a:spcAft>
+              <a:buSzPct val="100000"/>
+              <a:buChar char="•"/>
+            </a:pPr>
+            <a:r>
+              <a:rPr lang="en-US" sz="1600" dirty="0">
+                <a:solidFill>
+                  <a:schemeClr val="tx1"/>
+                </a:solidFill>
+              </a:rPr>
+              <a:t>Resolves the issue</a:t>
+            </a:r>
+            <a:endParaRPr lang="en-US" sz="1600" dirty="0"/>
+          </a:p>
+        </p:txBody>
+      </p:sp>
+      <p:sp>
+        <p:nvSpPr>
+          <p:cNvPr id="25" name="Slide Number Placeholder 0"/>
+          <p:cNvSpPr>
+            <a:spLocks noGrp="1"/>
+          </p:cNvSpPr>
+          <p:nvPr>
+            <p:ph type="sldNum" sz="quarter" idx="4294967295"/>
+          </p:nvPr>
+        </p:nvSpPr>
+        <p:spPr>
+          <a:xfrm>
+            <a:off x="10972800" y="6446520"/>
+            <a:ext cx="667512" cy="256032"/>
+          </a:xfrm>
+          <a:prstGeom prst="rect">
+            <a:avLst/>
+          </a:prstGeom>
+          <a:extLst>
+            <a:ext uri="{C572A759-6A51-4108-AA02-DFA0A04FC94B}">
+              <ma14:wrappingTextBoxFlag xmlns="" xmlns:ma14="http://schemas.microsoft.com/office/mac/drawingml/2011/main" val="0"/>
+            </a:ext>
+          </a:extLst>
+        </p:spPr>
+        <p:txBody>
+          <a:bodyPr/>
+          <a:lstStyle>
+            <a:lvl1pPr>
+              <a:defRPr sz="1000">
+                <a:solidFill>
+                  <a:schemeClr val="accent6"/>
+                </a:solidFill>
+              </a:defRPr>
+            </a:lvl1pPr>
+          </a:lstStyle>
+          <a:p>
+            <a:pPr algn="r"/>
+            <a:fld id="{F7021451-1387-4CA6-816F-3879F97B5CBC}" type="slidenum">
+              <a:rPr lang="en-US" b="0"/>
+              <a:t>11</a:t>
+            </a:fld>
+            <a:endParaRPr lang="en-US"/>
+          </a:p>
+        </p:txBody>
+      </p:sp>
+      <p:pic>
+        <p:nvPicPr>
+          <p:cNvPr id="11" name="Content Placeholder 7">
+            <a:extLst>
+              <a:ext uri="{FF2B5EF4-FFF2-40B4-BE49-F238E27FC236}">
+                <a16:creationId xmlns:a16="http://schemas.microsoft.com/office/drawing/2014/main" id="{BB6AF832-B0AC-0B37-8B7D-3B87AD93730A}"/>
+              </a:ext>
+            </a:extLst>
+          </p:cNvPr>
+          <p:cNvPicPr>
+            <a:picLocks noChangeAspect="1"/>
+          </p:cNvPicPr>
+          <p:nvPr/>
+        </p:nvPicPr>
+        <p:blipFill>
+          <a:blip r:embed="rId4"/>
+          <a:stretch>
+            <a:fillRect/>
+          </a:stretch>
+        </p:blipFill>
+        <p:spPr>
+          <a:xfrm>
+            <a:off x="159026" y="1371600"/>
+            <a:ext cx="7063409" cy="4512365"/>
+          </a:xfrm>
+          <a:prstGeom prst="rect">
+            <a:avLst/>
+          </a:prstGeom>
+        </p:spPr>
+      </p:pic>
+    </p:spTree>
+  </p:cSld>
+  <p:clrMapOvr>
+    <a:masterClrMapping/>
+  </p:clrMapOvr>
+</p:sld>
+</file>
+
+<file path=ppt/slides/slide12.xml><?xml version="1.0" encoding="utf-8"?>
+<p:sld xmlns:a="http://schemas.openxmlformats.org/drawingml/2006/main" xmlns:r="http://schemas.openxmlformats.org/officeDocument/2006/relationships" xmlns:p="http://schemas.openxmlformats.org/presentationml/2006/main">
+  <p:cSld name="Slide 16">
+    <p:spTree>
+      <p:nvGrpSpPr>
+        <p:cNvPr id="1" name=""/>
+        <p:cNvGrpSpPr/>
+        <p:nvPr/>
+      </p:nvGrpSpPr>
+      <p:grpSpPr>
+        <a:xfrm>
+          <a:off x="0" y="0"/>
+          <a:ext cx="0" cy="0"/>
+          <a:chOff x="0" y="0"/>
+          <a:chExt cx="0" cy="0"/>
+        </a:xfrm>
+      </p:grpSpPr>
+      <p:sp>
+        <p:nvSpPr>
+          <p:cNvPr id="2" name="Text 0"/>
+          <p:cNvSpPr>
+            <a:spLocks noGrp="1"/>
+          </p:cNvSpPr>
+          <p:nvPr>
+            <p:ph type="title" idx="100" hasCustomPrompt="1"/>
+          </p:nvPr>
+        </p:nvSpPr>
+        <p:spPr>
+          <a:xfrm>
+            <a:off x="548640" y="365760"/>
+            <a:ext cx="11094415" cy="777240"/>
+          </a:xfrm>
+          <a:prstGeom prst="rect">
+            <a:avLst/>
+          </a:prstGeom>
+          <a:noFill/>
+          <a:ln/>
+        </p:spPr>
+        <p:txBody>
+          <a:bodyPr wrap="square" lIns="0" tIns="0" rIns="0" bIns="0" rtlCol="0" anchor="ctr"/>
+          <a:lstStyle/>
+          <a:p>
+            <a:pPr marL="0" indent="0" algn="l">
+              <a:buNone/>
+            </a:pPr>
+            <a:r>
+              <a:rPr lang="en-US" sz="3400" b="1" dirty="0">
+                <a:solidFill>
+                  <a:schemeClr val="tx2"/>
+                </a:solidFill>
+              </a:rPr>
+              <a:t>Live Demonstration: Administrator</a:t>
+            </a:r>
+            <a:endParaRPr lang="en-US" sz="3400" dirty="0"/>
+          </a:p>
+        </p:txBody>
+      </p:sp>
+      <p:sp>
+        <p:nvSpPr>
+          <p:cNvPr id="3" name="Admin workflow card"/>
+          <p:cNvSpPr/>
+          <p:nvPr/>
+        </p:nvSpPr>
+        <p:spPr>
+          <a:xfrm>
+            <a:off x="548640" y="1371600"/>
+            <a:ext cx="3611880" cy="4892040"/>
+          </a:xfrm>
+          <a:prstGeom prst="roundRect">
+            <a:avLst>
+              <a:gd name="adj" fmla="val 2532"/>
+            </a:avLst>
+          </a:prstGeom>
+          <a:solidFill>
+            <a:schemeClr val="bg1"/>
+          </a:solidFill>
+          <a:ln/>
+          <a:effectLst>
+            <a:outerShdw blurRad="127000" dist="25400" dir="5400000" algn="bl" rotWithShape="0">
+              <a:srgbClr val="0B1F33">
+                <a:alpha val="10000"/>
+              </a:srgbClr>
+            </a:outerShdw>
+          </a:effectLst>
+        </p:spPr>
+        <p:txBody>
+          <a:bodyPr/>
+          <a:lstStyle/>
+          <a:p>
+            <a:endParaRPr lang="en-AU"/>
+          </a:p>
+        </p:txBody>
+      </p:sp>
+      <p:sp>
+        <p:nvSpPr>
+          <p:cNvPr id="4" name="Admin workflow badge"/>
+          <p:cNvSpPr/>
+          <p:nvPr/>
+        </p:nvSpPr>
+        <p:spPr>
+          <a:xfrm>
+            <a:off x="822960" y="1554480"/>
+            <a:ext cx="502920" cy="502920"/>
+          </a:xfrm>
+          <a:prstGeom prst="ellipse">
+            <a:avLst/>
+          </a:prstGeom>
+          <a:solidFill>
+            <a:schemeClr val="accent2"/>
+          </a:solidFill>
+          <a:ln/>
+        </p:spPr>
+        <p:txBody>
+          <a:bodyPr/>
+          <a:lstStyle/>
+          <a:p>
+            <a:endParaRPr lang="en-AU"/>
+          </a:p>
+        </p:txBody>
+      </p:sp>
+      <p:pic>
+        <p:nvPicPr>
+          <p:cNvPr id="5" name="Admin workflow icon" descr="Admin workflow"/>
+          <p:cNvPicPr>
+            <a:picLocks noChangeAspect="1"/>
+          </p:cNvPicPr>
+          <p:nvPr/>
+        </p:nvPicPr>
+        <p:blipFill>
+          <a:blip r:embed="rId3"/>
+          <a:stretch>
+            <a:fillRect/>
+          </a:stretch>
+        </p:blipFill>
+        <p:spPr>
+          <a:xfrm>
+            <a:off x="958748" y="1690268"/>
+            <a:ext cx="231343" cy="231343"/>
+          </a:xfrm>
+          <a:prstGeom prst="rect">
+            <a:avLst/>
+          </a:prstGeom>
+        </p:spPr>
+      </p:pic>
+      <p:sp>
+        <p:nvSpPr>
+          <p:cNvPr id="6" name="Admin workflow heading"/>
+          <p:cNvSpPr txBox="1"/>
+          <p:nvPr/>
+        </p:nvSpPr>
+        <p:spPr>
+          <a:xfrm>
+            <a:off x="1508760" y="1554480"/>
+            <a:ext cx="4206240" cy="502920"/>
+          </a:xfrm>
+          <a:prstGeom prst="rect">
+            <a:avLst/>
+          </a:prstGeom>
+          <a:noFill/>
+          <a:ln/>
+        </p:spPr>
+        <p:txBody>
+          <a:bodyPr wrap="square" lIns="0" tIns="0" rIns="0" bIns="0" rtlCol="0" anchor="ctr"/>
+          <a:lstStyle/>
+          <a:p>
+            <a:pPr marL="0" indent="0">
+              <a:buNone/>
+            </a:pPr>
+            <a:r>
+              <a:rPr lang="en-US" sz="2000" b="1" dirty="0">
+                <a:solidFill>
+                  <a:schemeClr val="tx2"/>
+                </a:solidFill>
+              </a:rPr>
+              <a:t>Admin Workflow</a:t>
+            </a:r>
+            <a:endParaRPr lang="en-US" sz="2000" dirty="0"/>
+          </a:p>
+        </p:txBody>
+      </p:sp>
+      <p:sp>
+        <p:nvSpPr>
+          <p:cNvPr id="7" name="Text 4"/>
+          <p:cNvSpPr txBox="1"/>
+          <p:nvPr/>
+        </p:nvSpPr>
+        <p:spPr>
+          <a:xfrm>
+            <a:off x="822960" y="2240280"/>
+            <a:ext cx="3108960" cy="274320"/>
+          </a:xfrm>
+          <a:prstGeom prst="rect">
+            <a:avLst/>
+          </a:prstGeom>
+          <a:noFill/>
+          <a:ln/>
+        </p:spPr>
+        <p:txBody>
+          <a:bodyPr wrap="square" lIns="0" tIns="0" rIns="0" bIns="0" rtlCol="0" anchor="t"/>
+          <a:lstStyle/>
+          <a:p>
+            <a:pPr marL="0" indent="0">
+              <a:buNone/>
+            </a:pPr>
+            <a:r>
+              <a:rPr lang="en-US" sz="1600" dirty="0">
+                <a:solidFill>
+                  <a:schemeClr val="tx1"/>
+                </a:solidFill>
+              </a:rPr>
+              <a:t>The Admin interface provides:</a:t>
+            </a:r>
+            <a:endParaRPr lang="en-US" sz="1600" dirty="0"/>
+          </a:p>
+        </p:txBody>
+      </p:sp>
+      <p:sp>
+        <p:nvSpPr>
+          <p:cNvPr id="8" name="Text 5"/>
+          <p:cNvSpPr txBox="1"/>
+          <p:nvPr/>
+        </p:nvSpPr>
+        <p:spPr>
+          <a:xfrm>
+            <a:off x="822960" y="2651760"/>
+            <a:ext cx="3108960" cy="3474720"/>
+          </a:xfrm>
+          <a:prstGeom prst="rect">
+            <a:avLst/>
+          </a:prstGeom>
+          <a:noFill/>
+          <a:ln/>
+        </p:spPr>
+        <p:txBody>
+          <a:bodyPr wrap="square" lIns="0" tIns="0" rIns="0" bIns="0" rtlCol="0" anchor="t"/>
+          <a:lstStyle/>
+          <a:p>
+            <a:pPr marL="0" indent="0">
+              <a:buNone/>
+            </a:pPr>
+            <a:r>
+              <a:rPr lang="en-US" sz="1500" b="1" dirty="0">
+                <a:solidFill>
+                  <a:schemeClr val="accent1"/>
+                </a:solidFill>
+              </a:rPr>
+              <a:t>User Management</a:t>
+            </a:r>
+            <a:endParaRPr lang="en-US" sz="1400" dirty="0"/>
+          </a:p>
+          <a:p>
+            <a:pPr marL="685800" lvl="1" indent="-228600">
+              <a:buFont typeface="Arial" panose="020B0604020202020204" pitchFamily="34" charset="0"/>
+              <a:buChar char="•"/>
+            </a:pPr>
+            <a:r>
+              <a:rPr lang="en-AU" sz="1400" dirty="0"/>
+              <a:t>View users</a:t>
+            </a:r>
+          </a:p>
+          <a:p>
+            <a:pPr marL="685800" lvl="1" indent="-228600">
+              <a:buFont typeface="Arial" panose="020B0604020202020204" pitchFamily="34" charset="0"/>
+              <a:buChar char="•"/>
+            </a:pPr>
+            <a:r>
+              <a:rPr lang="en-AU" sz="1400" dirty="0"/>
+              <a:t>Create users</a:t>
+            </a:r>
+          </a:p>
+          <a:p>
+            <a:pPr marL="685800" lvl="1" indent="-228600">
+              <a:buFont typeface="Arial" panose="020B0604020202020204" pitchFamily="34" charset="0"/>
+              <a:buChar char="•"/>
+            </a:pPr>
+            <a:r>
+              <a:rPr lang="en-AU" sz="1400" dirty="0"/>
+              <a:t>Update roles</a:t>
+            </a:r>
+          </a:p>
+          <a:p>
+            <a:pPr marL="685800" lvl="1" indent="-228600">
+              <a:buFont typeface="Arial" panose="020B0604020202020204" pitchFamily="34" charset="0"/>
+              <a:buChar char="•"/>
+            </a:pPr>
+            <a:r>
+              <a:rPr lang="en-AU" sz="1400" dirty="0"/>
+              <a:t>Manage account status</a:t>
+            </a:r>
+          </a:p>
+          <a:p>
+            <a:pPr marL="0" indent="0">
+              <a:buNone/>
+            </a:pPr>
+            <a:r>
+              <a:rPr lang="en-US" sz="1500" b="1" dirty="0">
+                <a:solidFill>
+                  <a:schemeClr val="accent1"/>
+                </a:solidFill>
+              </a:rPr>
+              <a:t>Knowledge Base</a:t>
+            </a:r>
+            <a:endParaRPr lang="en-US" sz="1400" dirty="0"/>
+          </a:p>
+          <a:p>
+            <a:pPr marL="685800" lvl="1" indent="-228600">
+              <a:buFont typeface="Arial" panose="020B0604020202020204" pitchFamily="34" charset="0"/>
+              <a:buChar char="•"/>
+            </a:pPr>
+            <a:r>
+              <a:rPr lang="en-AU" sz="1400" dirty="0"/>
+              <a:t>Create entries</a:t>
+            </a:r>
+          </a:p>
+          <a:p>
+            <a:pPr marL="685800" lvl="1" indent="-228600">
+              <a:buFont typeface="Arial" panose="020B0604020202020204" pitchFamily="34" charset="0"/>
+              <a:buChar char="•"/>
+            </a:pPr>
+            <a:r>
+              <a:rPr lang="en-AU" sz="1400" dirty="0"/>
+              <a:t>Update entries</a:t>
+            </a:r>
+          </a:p>
+          <a:p>
+            <a:pPr marL="685800" lvl="1" indent="-228600">
+              <a:buFont typeface="Arial" panose="020B0604020202020204" pitchFamily="34" charset="0"/>
+              <a:buChar char="•"/>
+            </a:pPr>
+            <a:r>
+              <a:rPr lang="en-AU" sz="1400" dirty="0"/>
+              <a:t>Delete entries</a:t>
+            </a:r>
+          </a:p>
+          <a:p>
+            <a:pPr marL="0" indent="0">
+              <a:buNone/>
+            </a:pPr>
+            <a:r>
+              <a:rPr lang="en-US" sz="1500" b="1" dirty="0">
+                <a:solidFill>
+                  <a:schemeClr val="accent1"/>
+                </a:solidFill>
+              </a:rPr>
+              <a:t>Analytics</a:t>
+            </a:r>
+            <a:endParaRPr lang="en-US" sz="1400" dirty="0"/>
+          </a:p>
+          <a:p>
+            <a:pPr marL="685800" lvl="1" indent="-228600">
+              <a:buFont typeface="Arial" panose="020B0604020202020204" pitchFamily="34" charset="0"/>
+              <a:buChar char="•"/>
+            </a:pPr>
+            <a:r>
+              <a:rPr lang="en-AU" sz="1400" dirty="0"/>
+              <a:t>Ticket statistics</a:t>
+            </a:r>
+          </a:p>
+          <a:p>
+            <a:pPr marL="685800" lvl="1" indent="-228600">
+              <a:buFont typeface="Arial" panose="020B0604020202020204" pitchFamily="34" charset="0"/>
+              <a:buChar char="•"/>
+            </a:pPr>
+            <a:r>
+              <a:rPr lang="en-AU" sz="1400" dirty="0"/>
+              <a:t>Escalation information</a:t>
+            </a:r>
+          </a:p>
+          <a:p>
+            <a:pPr marL="685800" lvl="1" indent="-228600">
+              <a:buFont typeface="Arial" panose="020B0604020202020204" pitchFamily="34" charset="0"/>
+              <a:buChar char="•"/>
+            </a:pPr>
+            <a:r>
+              <a:rPr lang="en-AU" sz="1400" dirty="0"/>
+              <a:t>Support metrics</a:t>
+            </a:r>
+          </a:p>
+          <a:p>
+            <a:pPr marL="0" indent="0">
+              <a:buNone/>
+            </a:pPr>
+            <a:r>
+              <a:rPr lang="en-US" sz="1500" b="1" dirty="0">
+                <a:solidFill>
+                  <a:schemeClr val="accent1"/>
+                </a:solidFill>
+              </a:rPr>
+              <a:t>System Logs</a:t>
+            </a:r>
+            <a:endParaRPr lang="en-US" sz="1400" dirty="0"/>
+          </a:p>
+          <a:p>
+            <a:pPr marL="685800" lvl="1" indent="-228600">
+              <a:buFont typeface="Arial" panose="020B0604020202020204" pitchFamily="34" charset="0"/>
+              <a:buChar char="•"/>
+            </a:pPr>
+            <a:r>
+              <a:rPr lang="en-AU" sz="1400" dirty="0"/>
+              <a:t>Review important application activities</a:t>
+            </a:r>
+          </a:p>
+        </p:txBody>
+      </p:sp>
+      <p:pic>
+        <p:nvPicPr>
+          <p:cNvPr id="10" name="Ticket Queue screenshot" descr="Ticket Queue screenshot"/>
+          <p:cNvPicPr>
+            <a:picLocks noChangeAspect="1"/>
+          </p:cNvPicPr>
+          <p:nvPr/>
+        </p:nvPicPr>
+        <p:blipFill>
+          <a:blip r:embed="rId4"/>
+          <a:stretch>
+            <a:fillRect/>
+          </a:stretch>
+        </p:blipFill>
+        <p:spPr>
+          <a:xfrm>
+            <a:off x="4572000" y="1508760"/>
+            <a:ext cx="3282696" cy="1570361"/>
+          </a:xfrm>
+          <a:prstGeom prst="rect">
+            <a:avLst/>
+          </a:prstGeom>
+        </p:spPr>
+      </p:pic>
+      <p:sp>
+        <p:nvSpPr>
+          <p:cNvPr id="11" name="Text 7"/>
+          <p:cNvSpPr txBox="1"/>
+          <p:nvPr/>
+        </p:nvSpPr>
+        <p:spPr>
+          <a:xfrm>
+            <a:off x="4572000" y="3188849"/>
+            <a:ext cx="3282696" cy="274320"/>
+          </a:xfrm>
+          <a:prstGeom prst="rect">
+            <a:avLst/>
+          </a:prstGeom>
+          <a:noFill/>
+          <a:ln/>
+        </p:spPr>
+        <p:txBody>
+          <a:bodyPr wrap="square" lIns="0" tIns="0" rIns="0" bIns="0" rtlCol="0" anchor="t"/>
+          <a:lstStyle/>
+          <a:p>
+            <a:pPr marL="0" indent="0">
+              <a:buNone/>
+            </a:pPr>
+            <a:r>
+              <a:rPr lang="en-US" sz="1200" b="1" dirty="0">
+                <a:solidFill>
+                  <a:schemeClr val="accent6"/>
+                </a:solidFill>
+              </a:rPr>
+              <a:t>Ticket Queue</a:t>
+            </a:r>
+            <a:endParaRPr lang="en-US" sz="1200" dirty="0"/>
+          </a:p>
+        </p:txBody>
+      </p:sp>
+      <p:pic>
+        <p:nvPicPr>
+          <p:cNvPr id="13" name="Analytics screenshot" descr="Analytics screenshot"/>
+          <p:cNvPicPr>
+            <a:picLocks noChangeAspect="1"/>
+          </p:cNvPicPr>
+          <p:nvPr/>
+        </p:nvPicPr>
+        <p:blipFill>
+          <a:blip r:embed="rId5"/>
+          <a:stretch>
+            <a:fillRect/>
+          </a:stretch>
+        </p:blipFill>
+        <p:spPr>
+          <a:xfrm>
+            <a:off x="8220456" y="1508760"/>
+            <a:ext cx="3282696" cy="1567055"/>
+          </a:xfrm>
+          <a:prstGeom prst="rect">
+            <a:avLst/>
+          </a:prstGeom>
+        </p:spPr>
+      </p:pic>
+      <p:sp>
+        <p:nvSpPr>
+          <p:cNvPr id="14" name="Text 9"/>
+          <p:cNvSpPr txBox="1"/>
+          <p:nvPr/>
+        </p:nvSpPr>
+        <p:spPr>
+          <a:xfrm>
+            <a:off x="8220456" y="3185543"/>
+            <a:ext cx="3282696" cy="274320"/>
+          </a:xfrm>
+          <a:prstGeom prst="rect">
+            <a:avLst/>
+          </a:prstGeom>
+          <a:noFill/>
+          <a:ln/>
+        </p:spPr>
+        <p:txBody>
+          <a:bodyPr wrap="square" lIns="0" tIns="0" rIns="0" bIns="0" rtlCol="0" anchor="t"/>
+          <a:lstStyle/>
+          <a:p>
+            <a:pPr marL="0" indent="0">
+              <a:buNone/>
+            </a:pPr>
+            <a:r>
+              <a:rPr lang="en-US" sz="1200" b="1" dirty="0">
+                <a:solidFill>
+                  <a:schemeClr val="accent6"/>
+                </a:solidFill>
+              </a:rPr>
+              <a:t>Analytics</a:t>
+            </a:r>
+            <a:endParaRPr lang="en-US" sz="1200" dirty="0"/>
+          </a:p>
+        </p:txBody>
+      </p:sp>
+      <p:pic>
+        <p:nvPicPr>
+          <p:cNvPr id="16" name="User Management screenshot" descr="User Management screenshot"/>
+          <p:cNvPicPr>
+            <a:picLocks noChangeAspect="1"/>
+          </p:cNvPicPr>
+          <p:nvPr/>
+        </p:nvPicPr>
+        <p:blipFill>
+          <a:blip r:embed="rId6"/>
+          <a:stretch>
+            <a:fillRect/>
+          </a:stretch>
+        </p:blipFill>
+        <p:spPr>
+          <a:xfrm>
+            <a:off x="4572000" y="4069080"/>
+            <a:ext cx="3282696" cy="1574865"/>
+          </a:xfrm>
+          <a:prstGeom prst="rect">
+            <a:avLst/>
+          </a:prstGeom>
+        </p:spPr>
+      </p:pic>
+      <p:sp>
+        <p:nvSpPr>
+          <p:cNvPr id="17" name="Text 11"/>
+          <p:cNvSpPr txBox="1"/>
+          <p:nvPr/>
+        </p:nvSpPr>
+        <p:spPr>
+          <a:xfrm>
+            <a:off x="4572000" y="5753673"/>
+            <a:ext cx="3282696" cy="274320"/>
+          </a:xfrm>
+          <a:prstGeom prst="rect">
+            <a:avLst/>
+          </a:prstGeom>
+          <a:noFill/>
+          <a:ln/>
+        </p:spPr>
+        <p:txBody>
+          <a:bodyPr wrap="square" lIns="0" tIns="0" rIns="0" bIns="0" rtlCol="0" anchor="t"/>
+          <a:lstStyle/>
+          <a:p>
+            <a:pPr marL="0" indent="0">
+              <a:buNone/>
+            </a:pPr>
+            <a:r>
+              <a:rPr lang="en-US" sz="1200" b="1" dirty="0">
+                <a:solidFill>
+                  <a:schemeClr val="accent6"/>
+                </a:solidFill>
+              </a:rPr>
+              <a:t>User Management</a:t>
+            </a:r>
+            <a:endParaRPr lang="en-US" sz="1200" dirty="0"/>
+          </a:p>
+        </p:txBody>
+      </p:sp>
+      <p:pic>
+        <p:nvPicPr>
+          <p:cNvPr id="19" name="System Logs screenshot" descr="System Logs screenshot"/>
+          <p:cNvPicPr>
+            <a:picLocks noChangeAspect="1"/>
+          </p:cNvPicPr>
+          <p:nvPr/>
+        </p:nvPicPr>
+        <p:blipFill>
+          <a:blip r:embed="rId7"/>
+          <a:stretch>
+            <a:fillRect/>
+          </a:stretch>
+        </p:blipFill>
+        <p:spPr>
+          <a:xfrm>
+            <a:off x="8220456" y="4069080"/>
+            <a:ext cx="3282696" cy="1569910"/>
+          </a:xfrm>
+          <a:prstGeom prst="rect">
+            <a:avLst/>
+          </a:prstGeom>
+        </p:spPr>
+      </p:pic>
+      <p:sp>
+        <p:nvSpPr>
+          <p:cNvPr id="20" name="Text 13"/>
+          <p:cNvSpPr txBox="1"/>
+          <p:nvPr/>
+        </p:nvSpPr>
+        <p:spPr>
+          <a:xfrm>
+            <a:off x="8220456" y="5748718"/>
+            <a:ext cx="3282696" cy="274320"/>
+          </a:xfrm>
+          <a:prstGeom prst="rect">
+            <a:avLst/>
+          </a:prstGeom>
+          <a:noFill/>
+          <a:ln/>
+        </p:spPr>
+        <p:txBody>
+          <a:bodyPr wrap="square" lIns="0" tIns="0" rIns="0" bIns="0" rtlCol="0" anchor="t"/>
+          <a:lstStyle/>
+          <a:p>
+            <a:pPr marL="0" indent="0">
+              <a:buNone/>
+            </a:pPr>
+            <a:r>
+              <a:rPr lang="en-US" sz="1200" b="1" dirty="0">
+                <a:solidFill>
+                  <a:schemeClr val="accent6"/>
+                </a:solidFill>
+              </a:rPr>
+              <a:t>System Logs</a:t>
+            </a:r>
+            <a:endParaRPr lang="en-US" sz="1200" dirty="0"/>
+          </a:p>
+        </p:txBody>
+      </p:sp>
+      <p:sp>
+        <p:nvSpPr>
+          <p:cNvPr id="25" name="Slide Number Placeholder 0"/>
+          <p:cNvSpPr>
+            <a:spLocks noGrp="1"/>
+          </p:cNvSpPr>
+          <p:nvPr>
+            <p:ph type="sldNum" sz="quarter" idx="4294967295"/>
+          </p:nvPr>
+        </p:nvSpPr>
+        <p:spPr>
+          <a:xfrm>
+            <a:off x="10972800" y="6446520"/>
+            <a:ext cx="667512" cy="256032"/>
+          </a:xfrm>
+          <a:prstGeom prst="rect">
+            <a:avLst/>
+          </a:prstGeom>
+          <a:extLst>
+            <a:ext uri="{C572A759-6A51-4108-AA02-DFA0A04FC94B}">
+              <ma14:wrappingTextBoxFlag xmlns="" xmlns:ma14="http://schemas.microsoft.com/office/mac/drawingml/2011/main" val="0"/>
+            </a:ext>
+          </a:extLst>
+        </p:spPr>
+        <p:txBody>
+          <a:bodyPr/>
+          <a:lstStyle>
+            <a:lvl1pPr>
+              <a:defRPr sz="1000">
+                <a:solidFill>
+                  <a:schemeClr val="accent6"/>
+                </a:solidFill>
+              </a:defRPr>
+            </a:lvl1pPr>
+          </a:lstStyle>
+          <a:p>
+            <a:pPr algn="r"/>
+            <a:fld id="{F7021451-1387-4CA6-816F-3879F97B5CBC}" type="slidenum">
+              <a:rPr lang="en-US" b="0"/>
+              <a:t>12</a:t>
+            </a:fld>
+            <a:endParaRPr lang="en-US"/>
+          </a:p>
+        </p:txBody>
+      </p:sp>
+    </p:spTree>
+  </p:cSld>
+  <p:clrMapOvr>
+    <a:masterClrMapping/>
+  </p:clrMapOvr>
+</p:sld>
+</file>
+
+<file path=ppt/slides/slide13.xml><?xml version="1.0" encoding="utf-8"?>
+<p:sld xmlns:a="http://schemas.openxmlformats.org/drawingml/2006/main" xmlns:r="http://schemas.openxmlformats.org/officeDocument/2006/relationships" xmlns:p="http://schemas.openxmlformats.org/presentationml/2006/main">
   <p:cSld name="Slide 10">
     <p:spTree>
       <p:nvGrpSpPr>
@@ -3705,7 +5332,7 @@
           </a:prstGeom>
           <a:extLst>
             <a:ext uri="{C572A759-6A51-4108-AA02-DFA0A04FC94B}">
-              <ma14:wrappingTextBoxFlag xmlns:ma14="http://schemas.microsoft.com/office/mac/drawingml/2011/main" xmlns="" val="0"/>
+              <ma14:wrappingTextBoxFlag xmlns="" xmlns:ma14="http://schemas.microsoft.com/office/mac/drawingml/2011/main" val="0"/>
             </a:ext>
           </a:extLst>
         </p:spPr>
@@ -3724,7 +5351,7 @@
             <a:pPr algn="r"/>
             <a:fld id="{F7021451-1387-4CA6-816F-3879F97B5CBC}" type="slidenum">
               <a:rPr lang="en-US" b="0"/>
-              <a:t>10</a:t>
+              <a:t>13</a:t>
             </a:fld>
             <a:endParaRPr lang="en-US"/>
           </a:p>
@@ -3768,7 +5395,7 @@
 </p:sld>
 </file>
 
-<file path=ppt/slides/slide11.xml><?xml version="1.0" encoding="utf-8"?>
+<file path=ppt/slides/slide14.xml><?xml version="1.0" encoding="utf-8"?>
 <p:sld xmlns:a="http://schemas.openxmlformats.org/drawingml/2006/main" xmlns:r="http://schemas.openxmlformats.org/officeDocument/2006/relationships" xmlns:p="http://schemas.openxmlformats.org/presentationml/2006/main">
   <p:cSld name="Slide 11">
     <p:spTree>
@@ -4415,7 +6042,7 @@
           </a:prstGeom>
           <a:extLst>
             <a:ext uri="{C572A759-6A51-4108-AA02-DFA0A04FC94B}">
-              <ma14:wrappingTextBoxFlag xmlns:ma14="http://schemas.microsoft.com/office/mac/drawingml/2011/main" xmlns="" val="0"/>
+              <ma14:wrappingTextBoxFlag xmlns="" xmlns:ma14="http://schemas.microsoft.com/office/mac/drawingml/2011/main" val="0"/>
             </a:ext>
           </a:extLst>
         </p:spPr>
@@ -4434,7 +6061,7 @@
             <a:pPr algn="r"/>
             <a:fld id="{F7021451-1387-4CA6-816F-3879F97B5CBC}" type="slidenum">
               <a:rPr lang="en-US" b="0"/>
-              <a:t>11</a:t>
+              <a:t>14</a:t>
             </a:fld>
             <a:endParaRPr lang="en-US"/>
           </a:p>
@@ -4478,7 +6105,7 @@
 </p:sld>
 </file>
 
-<file path=ppt/slides/slide12.xml><?xml version="1.0" encoding="utf-8"?>
+<file path=ppt/slides/slide15.xml><?xml version="1.0" encoding="utf-8"?>
 <p:sld xmlns:a="http://schemas.openxmlformats.org/drawingml/2006/main" xmlns:r="http://schemas.openxmlformats.org/officeDocument/2006/relationships" xmlns:p="http://schemas.openxmlformats.org/presentationml/2006/main">
   <p:cSld name="Slide 12">
     <p:spTree>
@@ -4965,7 +6592,7 @@
           </a:prstGeom>
           <a:extLst>
             <a:ext uri="{C572A759-6A51-4108-AA02-DFA0A04FC94B}">
-              <ma14:wrappingTextBoxFlag xmlns:ma14="http://schemas.microsoft.com/office/mac/drawingml/2011/main" xmlns="" val="0"/>
+              <ma14:wrappingTextBoxFlag xmlns="" xmlns:ma14="http://schemas.microsoft.com/office/mac/drawingml/2011/main" val="0"/>
             </a:ext>
           </a:extLst>
         </p:spPr>
@@ -4984,7 +6611,7 @@
             <a:pPr algn="r"/>
             <a:fld id="{F7021451-1387-4CA6-816F-3879F97B5CBC}" type="slidenum">
               <a:rPr lang="en-US" b="0"/>
-              <a:t>12</a:t>
+              <a:t>15</a:t>
             </a:fld>
             <a:endParaRPr lang="en-US"/>
           </a:p>
@@ -5028,7 +6655,7 @@
 </p:sld>
 </file>
 
-<file path=ppt/slides/slide13.xml><?xml version="1.0" encoding="utf-8"?>
+<file path=ppt/slides/slide16.xml><?xml version="1.0" encoding="utf-8"?>
 <p:sld xmlns:a="http://schemas.openxmlformats.org/drawingml/2006/main" xmlns:r="http://schemas.openxmlformats.org/officeDocument/2006/relationships" xmlns:p="http://schemas.openxmlformats.org/presentationml/2006/main">
   <p:cSld name="Slide 13">
     <p:spTree>
@@ -5710,1634 +7337,7 @@
           </a:prstGeom>
           <a:extLst>
             <a:ext uri="{C572A759-6A51-4108-AA02-DFA0A04FC94B}">
-              <ma14:wrappingTextBoxFlag xmlns:ma14="http://schemas.microsoft.com/office/mac/drawingml/2011/main" xmlns="" val="0"/>
-            </a:ext>
-          </a:extLst>
-        </p:spPr>
-        <p:txBody>
-          <a:bodyPr/>
-          <a:lstStyle>
-            <a:lvl1pPr>
-              <a:defRPr sz="1000">
-                <a:solidFill>
-                  <a:schemeClr val="accent6"/>
-                </a:solidFill>
-              </a:defRPr>
-            </a:lvl1pPr>
-          </a:lstStyle>
-          <a:p>
-            <a:pPr algn="r"/>
-            <a:fld id="{F7021451-1387-4CA6-816F-3879F97B5CBC}" type="slidenum">
-              <a:rPr lang="en-US" b="0"/>
-              <a:t>13</a:t>
-            </a:fld>
-            <a:endParaRPr lang="en-US"/>
-          </a:p>
-        </p:txBody>
-      </p:sp>
-    </p:spTree>
-  </p:cSld>
-  <p:clrMapOvr>
-    <a:masterClrMapping/>
-  </p:clrMapOvr>
-</p:sld>
-</file>
-
-<file path=ppt/slides/slide14.xml><?xml version="1.0" encoding="utf-8"?>
-<p:sld xmlns:a="http://schemas.openxmlformats.org/drawingml/2006/main" xmlns:r="http://schemas.openxmlformats.org/officeDocument/2006/relationships" xmlns:p="http://schemas.openxmlformats.org/presentationml/2006/main">
-  <p:cSld name="Slide 14">
-    <p:spTree>
-      <p:nvGrpSpPr>
-        <p:cNvPr id="1" name=""/>
-        <p:cNvGrpSpPr/>
-        <p:nvPr/>
-      </p:nvGrpSpPr>
-      <p:grpSpPr>
-        <a:xfrm>
-          <a:off x="0" y="0"/>
-          <a:ext cx="0" cy="0"/>
-          <a:chOff x="0" y="0"/>
-          <a:chExt cx="0" cy="0"/>
-        </a:xfrm>
-      </p:grpSpPr>
-      <p:sp>
-        <p:nvSpPr>
-          <p:cNvPr id="2" name="Text 0"/>
-          <p:cNvSpPr>
-            <a:spLocks noGrp="1"/>
-          </p:cNvSpPr>
-          <p:nvPr>
-            <p:ph type="title" idx="100" hasCustomPrompt="1"/>
-          </p:nvPr>
-        </p:nvSpPr>
-        <p:spPr>
-          <a:xfrm>
-            <a:off x="548640" y="365760"/>
-            <a:ext cx="11094415" cy="777240"/>
-          </a:xfrm>
-          <a:prstGeom prst="rect">
-            <a:avLst/>
-          </a:prstGeom>
-          <a:noFill/>
-          <a:ln/>
-        </p:spPr>
-        <p:txBody>
-          <a:bodyPr wrap="square" lIns="0" tIns="0" rIns="0" bIns="0" rtlCol="0" anchor="ctr"/>
-          <a:lstStyle/>
-          <a:p>
-            <a:pPr marL="0" indent="0" algn="l">
-              <a:buNone/>
-            </a:pPr>
-            <a:r>
-              <a:rPr lang="en-US" sz="3400" b="1" dirty="0">
-                <a:solidFill>
-                  <a:schemeClr val="tx2"/>
-                </a:solidFill>
-              </a:rPr>
-              <a:t>Live Demonstration: Client</a:t>
-            </a:r>
-            <a:endParaRPr lang="en-US" sz="3400" dirty="0"/>
-          </a:p>
-        </p:txBody>
-      </p:sp>
-      <p:sp>
-        <p:nvSpPr>
-          <p:cNvPr id="3" name="Client workflow card"/>
-          <p:cNvSpPr/>
-          <p:nvPr/>
-        </p:nvSpPr>
-        <p:spPr>
-          <a:xfrm>
-            <a:off x="548640" y="1371600"/>
-            <a:ext cx="4023360" cy="4892040"/>
-          </a:xfrm>
-          <a:prstGeom prst="roundRect">
-            <a:avLst>
-              <a:gd name="adj" fmla="val 2273"/>
-            </a:avLst>
-          </a:prstGeom>
-          <a:solidFill>
-            <a:schemeClr val="bg1"/>
-          </a:solidFill>
-          <a:ln/>
-          <a:effectLst>
-            <a:outerShdw blurRad="127000" dist="25400" dir="5400000" algn="bl" rotWithShape="0">
-              <a:srgbClr val="0B1F33">
-                <a:alpha val="10000"/>
-              </a:srgbClr>
-            </a:outerShdw>
-          </a:effectLst>
-        </p:spPr>
-        <p:txBody>
-          <a:bodyPr/>
-          <a:lstStyle/>
-          <a:p>
-            <a:endParaRPr lang="en-AU"/>
-          </a:p>
-        </p:txBody>
-      </p:sp>
-      <p:sp>
-        <p:nvSpPr>
-          <p:cNvPr id="4" name="Client workflow badge"/>
-          <p:cNvSpPr/>
-          <p:nvPr/>
-        </p:nvSpPr>
-        <p:spPr>
-          <a:xfrm>
-            <a:off x="822960" y="1554480"/>
-            <a:ext cx="502920" cy="502920"/>
-          </a:xfrm>
-          <a:prstGeom prst="ellipse">
-            <a:avLst/>
-          </a:prstGeom>
-          <a:solidFill>
-            <a:schemeClr val="accent1"/>
-          </a:solidFill>
-          <a:ln/>
-        </p:spPr>
-        <p:txBody>
-          <a:bodyPr/>
-          <a:lstStyle/>
-          <a:p>
-            <a:endParaRPr lang="en-AU"/>
-          </a:p>
-        </p:txBody>
-      </p:sp>
-      <p:pic>
-        <p:nvPicPr>
-          <p:cNvPr id="5" name="Client workflow icon" descr="Client workflow"/>
-          <p:cNvPicPr>
-            <a:picLocks noChangeAspect="1"/>
-          </p:cNvPicPr>
-          <p:nvPr/>
-        </p:nvPicPr>
-        <p:blipFill>
-          <a:blip r:embed="rId3"/>
-          <a:stretch>
-            <a:fillRect/>
-          </a:stretch>
-        </p:blipFill>
-        <p:spPr>
-          <a:xfrm>
-            <a:off x="958748" y="1690268"/>
-            <a:ext cx="231343" cy="231343"/>
-          </a:xfrm>
-          <a:prstGeom prst="rect">
-            <a:avLst/>
-          </a:prstGeom>
-        </p:spPr>
-      </p:pic>
-      <p:sp>
-        <p:nvSpPr>
-          <p:cNvPr id="6" name="Client workflow heading"/>
-          <p:cNvSpPr txBox="1"/>
-          <p:nvPr/>
-        </p:nvSpPr>
-        <p:spPr>
-          <a:xfrm>
-            <a:off x="1508760" y="1554480"/>
-            <a:ext cx="4206240" cy="502920"/>
-          </a:xfrm>
-          <a:prstGeom prst="rect">
-            <a:avLst/>
-          </a:prstGeom>
-          <a:noFill/>
-          <a:ln/>
-        </p:spPr>
-        <p:txBody>
-          <a:bodyPr wrap="square" lIns="0" tIns="0" rIns="0" bIns="0" rtlCol="0" anchor="ctr"/>
-          <a:lstStyle/>
-          <a:p>
-            <a:pPr marL="0" indent="0">
-              <a:buNone/>
-            </a:pPr>
-            <a:r>
-              <a:rPr lang="en-US" sz="2000" b="1" dirty="0">
-                <a:solidFill>
-                  <a:schemeClr val="tx2"/>
-                </a:solidFill>
-              </a:rPr>
-              <a:t>Client Workflow</a:t>
-            </a:r>
-            <a:endParaRPr lang="en-US" sz="2000" dirty="0"/>
-          </a:p>
-        </p:txBody>
-      </p:sp>
-      <p:sp>
-        <p:nvSpPr>
-          <p:cNvPr id="7" name="Text 4"/>
-          <p:cNvSpPr txBox="1"/>
-          <p:nvPr/>
-        </p:nvSpPr>
-        <p:spPr>
-          <a:xfrm>
-            <a:off x="822960" y="2286000"/>
-            <a:ext cx="3474720" cy="502920"/>
-          </a:xfrm>
-          <a:prstGeom prst="rect">
-            <a:avLst/>
-          </a:prstGeom>
-          <a:noFill/>
-          <a:ln/>
-        </p:spPr>
-        <p:txBody>
-          <a:bodyPr wrap="square" lIns="0" tIns="0" rIns="0" bIns="0" rtlCol="0" anchor="t"/>
-          <a:lstStyle/>
-          <a:p>
-            <a:pPr marL="0" indent="0">
-              <a:buNone/>
-            </a:pPr>
-            <a:r>
-              <a:rPr lang="en-US" sz="1600" dirty="0">
-                <a:solidFill>
-                  <a:schemeClr val="tx1"/>
-                </a:solidFill>
-              </a:rPr>
-              <a:t>During the live demonstration we will show:</a:t>
-            </a:r>
-            <a:endParaRPr lang="en-US" sz="1600" dirty="0"/>
-          </a:p>
-        </p:txBody>
-      </p:sp>
-      <p:sp>
-        <p:nvSpPr>
-          <p:cNvPr id="8" name="Text 5"/>
-          <p:cNvSpPr txBox="1"/>
-          <p:nvPr/>
-        </p:nvSpPr>
-        <p:spPr>
-          <a:xfrm>
-            <a:off x="822960" y="2880360"/>
-            <a:ext cx="3474720" cy="3200400"/>
-          </a:xfrm>
-          <a:prstGeom prst="rect">
-            <a:avLst/>
-          </a:prstGeom>
-          <a:noFill/>
-          <a:ln/>
-        </p:spPr>
-        <p:txBody>
-          <a:bodyPr wrap="square" lIns="0" tIns="0" rIns="0" bIns="0" rtlCol="0" anchor="t"/>
-          <a:lstStyle/>
-          <a:p>
-            <a:pPr marL="203200" indent="-203200">
-              <a:spcAft>
-                <a:spcPts val="600"/>
-              </a:spcAft>
-              <a:buSzPct val="100000"/>
-              <a:buChar char="•"/>
-            </a:pPr>
-            <a:r>
-              <a:rPr lang="en-US" sz="1600" dirty="0">
-                <a:solidFill>
-                  <a:schemeClr val="tx1"/>
-                </a:solidFill>
-              </a:rPr>
-              <a:t>Client registration/login</a:t>
-            </a:r>
-            <a:endParaRPr lang="en-US" sz="1600" dirty="0"/>
-          </a:p>
-          <a:p>
-            <a:pPr marL="203200" indent="-203200">
-              <a:spcAft>
-                <a:spcPts val="600"/>
-              </a:spcAft>
-              <a:buSzPct val="100000"/>
-              <a:buChar char="•"/>
-            </a:pPr>
-            <a:r>
-              <a:rPr lang="en-US" sz="1600" dirty="0">
-                <a:solidFill>
-                  <a:schemeClr val="tx1"/>
-                </a:solidFill>
-              </a:rPr>
-              <a:t>AI-assisted chat</a:t>
-            </a:r>
-            <a:endParaRPr lang="en-US" sz="1600" dirty="0"/>
-          </a:p>
-          <a:p>
-            <a:pPr marL="203200" indent="-203200">
-              <a:spcAft>
-                <a:spcPts val="600"/>
-              </a:spcAft>
-              <a:buSzPct val="100000"/>
-              <a:buChar char="•"/>
-            </a:pPr>
-            <a:r>
-              <a:rPr lang="en-US" sz="1600" dirty="0">
-                <a:solidFill>
-                  <a:schemeClr val="tx1"/>
-                </a:solidFill>
-              </a:rPr>
-              <a:t>AI response</a:t>
-            </a:r>
-            <a:endParaRPr lang="en-US" sz="1600" dirty="0"/>
-          </a:p>
-          <a:p>
-            <a:pPr marL="203200" indent="-203200">
-              <a:spcAft>
-                <a:spcPts val="600"/>
-              </a:spcAft>
-              <a:buSzPct val="100000"/>
-              <a:buChar char="•"/>
-            </a:pPr>
-            <a:r>
-              <a:rPr lang="en-US" sz="1600" dirty="0">
-                <a:solidFill>
-                  <a:schemeClr val="tx1"/>
-                </a:solidFill>
-              </a:rPr>
-              <a:t>Ticket creation/escalation</a:t>
-            </a:r>
-            <a:endParaRPr lang="en-US" sz="1600" dirty="0"/>
-          </a:p>
-          <a:p>
-            <a:pPr marL="203200" indent="-203200">
-              <a:spcAft>
-                <a:spcPts val="600"/>
-              </a:spcAft>
-              <a:buSzPct val="100000"/>
-              <a:buChar char="•"/>
-            </a:pPr>
-            <a:r>
-              <a:rPr lang="en-US" sz="1600" dirty="0">
-                <a:solidFill>
-                  <a:schemeClr val="tx1"/>
-                </a:solidFill>
-              </a:rPr>
-              <a:t>Customer ticket list</a:t>
-            </a:r>
-            <a:endParaRPr lang="en-US" sz="1600" dirty="0"/>
-          </a:p>
-          <a:p>
-            <a:pPr marL="203200" indent="-203200">
-              <a:spcAft>
-                <a:spcPts val="600"/>
-              </a:spcAft>
-              <a:buSzPct val="100000"/>
-              <a:buChar char="•"/>
-            </a:pPr>
-            <a:r>
-              <a:rPr lang="en-US" sz="1600" dirty="0">
-                <a:solidFill>
-                  <a:schemeClr val="tx1"/>
-                </a:solidFill>
-              </a:rPr>
-              <a:t>Ticket details/status</a:t>
-            </a:r>
-            <a:endParaRPr lang="en-US" sz="1600" dirty="0"/>
-          </a:p>
-          <a:p>
-            <a:pPr marL="203200" indent="-203200">
-              <a:spcAft>
-                <a:spcPts val="600"/>
-              </a:spcAft>
-              <a:buSzPct val="100000"/>
-              <a:buChar char="•"/>
-            </a:pPr>
-            <a:r>
-              <a:rPr lang="en-US" sz="1600" dirty="0">
-                <a:solidFill>
-                  <a:schemeClr val="tx1"/>
-                </a:solidFill>
-              </a:rPr>
-              <a:t>Conversation history</a:t>
-            </a:r>
-            <a:endParaRPr lang="en-US" sz="1600" dirty="0"/>
-          </a:p>
-          <a:p>
-            <a:pPr marL="203200" indent="-203200">
-              <a:spcAft>
-                <a:spcPts val="600"/>
-              </a:spcAft>
-              <a:buSzPct val="100000"/>
-              <a:buChar char="•"/>
-            </a:pPr>
-            <a:r>
-              <a:rPr lang="en-US" sz="1600" dirty="0">
-                <a:solidFill>
-                  <a:schemeClr val="tx1"/>
-                </a:solidFill>
-              </a:rPr>
-              <a:t>Agent response visible to the customer</a:t>
-            </a:r>
-            <a:endParaRPr lang="en-US" sz="1600" dirty="0"/>
-          </a:p>
-        </p:txBody>
-      </p:sp>
-      <p:sp>
-        <p:nvSpPr>
-          <p:cNvPr id="25" name="Slide Number Placeholder 0"/>
-          <p:cNvSpPr>
-            <a:spLocks noGrp="1"/>
-          </p:cNvSpPr>
-          <p:nvPr>
-            <p:ph type="sldNum" sz="quarter" idx="4294967295"/>
-          </p:nvPr>
-        </p:nvSpPr>
-        <p:spPr>
-          <a:xfrm>
-            <a:off x="10972800" y="6446520"/>
-            <a:ext cx="667512" cy="256032"/>
-          </a:xfrm>
-          <a:prstGeom prst="rect">
-            <a:avLst/>
-          </a:prstGeom>
-          <a:extLst>
-            <a:ext uri="{C572A759-6A51-4108-AA02-DFA0A04FC94B}">
-              <ma14:wrappingTextBoxFlag xmlns:ma14="http://schemas.microsoft.com/office/mac/drawingml/2011/main" xmlns="" val="0"/>
-            </a:ext>
-          </a:extLst>
-        </p:spPr>
-        <p:txBody>
-          <a:bodyPr/>
-          <a:lstStyle>
-            <a:lvl1pPr>
-              <a:defRPr sz="1000">
-                <a:solidFill>
-                  <a:schemeClr val="accent6"/>
-                </a:solidFill>
-              </a:defRPr>
-            </a:lvl1pPr>
-          </a:lstStyle>
-          <a:p>
-            <a:pPr algn="r"/>
-            <a:fld id="{F7021451-1387-4CA6-816F-3879F97B5CBC}" type="slidenum">
-              <a:rPr lang="en-US" b="0"/>
-              <a:t>14</a:t>
-            </a:fld>
-            <a:endParaRPr lang="en-US"/>
-          </a:p>
-        </p:txBody>
-      </p:sp>
-      <p:pic>
-        <p:nvPicPr>
-          <p:cNvPr id="11" name="Content Placeholder 5">
-            <a:extLst>
-              <a:ext uri="{FF2B5EF4-FFF2-40B4-BE49-F238E27FC236}">
-                <a16:creationId xmlns:a16="http://schemas.microsoft.com/office/drawing/2014/main" id="{6BEB5E5A-5BB7-E9FF-1FEA-9B4E72B9C84A}"/>
-              </a:ext>
-            </a:extLst>
-          </p:cNvPr>
-          <p:cNvPicPr>
-            <a:picLocks noChangeAspect="1"/>
-          </p:cNvPicPr>
-          <p:nvPr/>
-        </p:nvPicPr>
-        <p:blipFill>
-          <a:blip r:embed="rId4"/>
-          <a:stretch>
-            <a:fillRect/>
-          </a:stretch>
-        </p:blipFill>
-        <p:spPr>
-          <a:xfrm>
-            <a:off x="4846320" y="1371600"/>
-            <a:ext cx="7142922" cy="4590842"/>
-          </a:xfrm>
-          <a:prstGeom prst="rect">
-            <a:avLst/>
-          </a:prstGeom>
-        </p:spPr>
-      </p:pic>
-    </p:spTree>
-  </p:cSld>
-  <p:clrMapOvr>
-    <a:masterClrMapping/>
-  </p:clrMapOvr>
-</p:sld>
-</file>
-
-<file path=ppt/slides/slide15.xml><?xml version="1.0" encoding="utf-8"?>
-<p:sld xmlns:a="http://schemas.openxmlformats.org/drawingml/2006/main" xmlns:r="http://schemas.openxmlformats.org/officeDocument/2006/relationships" xmlns:p="http://schemas.openxmlformats.org/presentationml/2006/main">
-  <p:cSld name="Slide 15">
-    <p:spTree>
-      <p:nvGrpSpPr>
-        <p:cNvPr id="1" name=""/>
-        <p:cNvGrpSpPr/>
-        <p:nvPr/>
-      </p:nvGrpSpPr>
-      <p:grpSpPr>
-        <a:xfrm>
-          <a:off x="0" y="0"/>
-          <a:ext cx="0" cy="0"/>
-          <a:chOff x="0" y="0"/>
-          <a:chExt cx="0" cy="0"/>
-        </a:xfrm>
-      </p:grpSpPr>
-      <p:sp>
-        <p:nvSpPr>
-          <p:cNvPr id="2" name="Text 0"/>
-          <p:cNvSpPr>
-            <a:spLocks noGrp="1"/>
-          </p:cNvSpPr>
-          <p:nvPr>
-            <p:ph type="title" idx="100" hasCustomPrompt="1"/>
-          </p:nvPr>
-        </p:nvSpPr>
-        <p:spPr>
-          <a:xfrm>
-            <a:off x="548640" y="365760"/>
-            <a:ext cx="11094415" cy="777240"/>
-          </a:xfrm>
-          <a:prstGeom prst="rect">
-            <a:avLst/>
-          </a:prstGeom>
-          <a:noFill/>
-          <a:ln/>
-        </p:spPr>
-        <p:txBody>
-          <a:bodyPr wrap="square" lIns="0" tIns="0" rIns="0" bIns="0" rtlCol="0" anchor="ctr"/>
-          <a:lstStyle/>
-          <a:p>
-            <a:pPr marL="0" indent="0" algn="l">
-              <a:buNone/>
-            </a:pPr>
-            <a:r>
-              <a:rPr lang="en-US" sz="3400" b="1" dirty="0">
-                <a:solidFill>
-                  <a:schemeClr val="tx2"/>
-                </a:solidFill>
-              </a:rPr>
-              <a:t>Live Demonstration: Support Agent</a:t>
-            </a:r>
-            <a:endParaRPr lang="en-US" sz="3400" dirty="0"/>
-          </a:p>
-        </p:txBody>
-      </p:sp>
-      <p:sp>
-        <p:nvSpPr>
-          <p:cNvPr id="5" name="Agent workflow card"/>
-          <p:cNvSpPr/>
-          <p:nvPr/>
-        </p:nvSpPr>
-        <p:spPr>
-          <a:xfrm>
-            <a:off x="7616952" y="1371600"/>
-            <a:ext cx="4023360" cy="4892040"/>
-          </a:xfrm>
-          <a:prstGeom prst="roundRect">
-            <a:avLst>
-              <a:gd name="adj" fmla="val 2273"/>
-            </a:avLst>
-          </a:prstGeom>
-          <a:solidFill>
-            <a:schemeClr val="bg1"/>
-          </a:solidFill>
-          <a:ln/>
-          <a:effectLst>
-            <a:outerShdw blurRad="127000" dist="25400" dir="5400000" algn="bl" rotWithShape="0">
-              <a:srgbClr val="0B1F33">
-                <a:alpha val="10000"/>
-              </a:srgbClr>
-            </a:outerShdw>
-          </a:effectLst>
-        </p:spPr>
-        <p:txBody>
-          <a:bodyPr/>
-          <a:lstStyle/>
-          <a:p>
-            <a:endParaRPr lang="en-AU"/>
-          </a:p>
-        </p:txBody>
-      </p:sp>
-      <p:sp>
-        <p:nvSpPr>
-          <p:cNvPr id="6" name="Agent workflow badge"/>
-          <p:cNvSpPr/>
-          <p:nvPr/>
-        </p:nvSpPr>
-        <p:spPr>
-          <a:xfrm>
-            <a:off x="7891272" y="1554480"/>
-            <a:ext cx="502920" cy="502920"/>
-          </a:xfrm>
-          <a:prstGeom prst="ellipse">
-            <a:avLst/>
-          </a:prstGeom>
-          <a:solidFill>
-            <a:schemeClr val="accent3"/>
-          </a:solidFill>
-          <a:ln/>
-        </p:spPr>
-        <p:txBody>
-          <a:bodyPr/>
-          <a:lstStyle/>
-          <a:p>
-            <a:endParaRPr lang="en-AU"/>
-          </a:p>
-        </p:txBody>
-      </p:sp>
-      <p:pic>
-        <p:nvPicPr>
-          <p:cNvPr id="7" name="Agent workflow icon" descr="Agent workflow"/>
-          <p:cNvPicPr>
-            <a:picLocks noChangeAspect="1"/>
-          </p:cNvPicPr>
-          <p:nvPr/>
-        </p:nvPicPr>
-        <p:blipFill>
-          <a:blip r:embed="rId3"/>
-          <a:stretch>
-            <a:fillRect/>
-          </a:stretch>
-        </p:blipFill>
-        <p:spPr>
-          <a:xfrm>
-            <a:off x="8027060" y="1690268"/>
-            <a:ext cx="231343" cy="231343"/>
-          </a:xfrm>
-          <a:prstGeom prst="rect">
-            <a:avLst/>
-          </a:prstGeom>
-        </p:spPr>
-      </p:pic>
-      <p:sp>
-        <p:nvSpPr>
-          <p:cNvPr id="8" name="Agent workflow heading"/>
-          <p:cNvSpPr txBox="1"/>
-          <p:nvPr/>
-        </p:nvSpPr>
-        <p:spPr>
-          <a:xfrm>
-            <a:off x="8577072" y="1554480"/>
-            <a:ext cx="4206240" cy="502920"/>
-          </a:xfrm>
-          <a:prstGeom prst="rect">
-            <a:avLst/>
-          </a:prstGeom>
-          <a:noFill/>
-          <a:ln/>
-        </p:spPr>
-        <p:txBody>
-          <a:bodyPr wrap="square" lIns="0" tIns="0" rIns="0" bIns="0" rtlCol="0" anchor="ctr"/>
-          <a:lstStyle/>
-          <a:p>
-            <a:pPr marL="0" indent="0">
-              <a:buNone/>
-            </a:pPr>
-            <a:r>
-              <a:rPr lang="en-US" sz="2000" b="1" dirty="0">
-                <a:solidFill>
-                  <a:schemeClr val="tx2"/>
-                </a:solidFill>
-              </a:rPr>
-              <a:t>Agent Workflow</a:t>
-            </a:r>
-            <a:endParaRPr lang="en-US" sz="2000" dirty="0"/>
-          </a:p>
-        </p:txBody>
-      </p:sp>
-      <p:sp>
-        <p:nvSpPr>
-          <p:cNvPr id="9" name="Text 5"/>
-          <p:cNvSpPr txBox="1"/>
-          <p:nvPr/>
-        </p:nvSpPr>
-        <p:spPr>
-          <a:xfrm>
-            <a:off x="7891272" y="2286000"/>
-            <a:ext cx="3474720" cy="502920"/>
-          </a:xfrm>
-          <a:prstGeom prst="rect">
-            <a:avLst/>
-          </a:prstGeom>
-          <a:noFill/>
-          <a:ln/>
-        </p:spPr>
-        <p:txBody>
-          <a:bodyPr wrap="square" lIns="0" tIns="0" rIns="0" bIns="0" rtlCol="0" anchor="t"/>
-          <a:lstStyle/>
-          <a:p>
-            <a:pPr marL="0" indent="0">
-              <a:buNone/>
-            </a:pPr>
-            <a:r>
-              <a:rPr lang="en-US" sz="1600" dirty="0">
-                <a:solidFill>
-                  <a:schemeClr val="tx1"/>
-                </a:solidFill>
-              </a:rPr>
-              <a:t>After the customer issue is escalated:</a:t>
-            </a:r>
-            <a:endParaRPr lang="en-US" sz="1600" dirty="0"/>
-          </a:p>
-        </p:txBody>
-      </p:sp>
-      <p:sp>
-        <p:nvSpPr>
-          <p:cNvPr id="10" name="Text 6"/>
-          <p:cNvSpPr txBox="1"/>
-          <p:nvPr/>
-        </p:nvSpPr>
-        <p:spPr>
-          <a:xfrm>
-            <a:off x="7891272" y="2880360"/>
-            <a:ext cx="3474720" cy="3200400"/>
-          </a:xfrm>
-          <a:prstGeom prst="rect">
-            <a:avLst/>
-          </a:prstGeom>
-          <a:noFill/>
-          <a:ln/>
-        </p:spPr>
-        <p:txBody>
-          <a:bodyPr wrap="square" lIns="0" tIns="0" rIns="0" bIns="0" rtlCol="0" anchor="t"/>
-          <a:lstStyle/>
-          <a:p>
-            <a:pPr marL="203200" indent="-203200">
-              <a:spcAft>
-                <a:spcPts val="600"/>
-              </a:spcAft>
-              <a:buSzPct val="100000"/>
-              <a:buChar char="•"/>
-            </a:pPr>
-            <a:r>
-              <a:rPr lang="en-US" sz="1600" dirty="0">
-                <a:solidFill>
-                  <a:schemeClr val="tx1"/>
-                </a:solidFill>
-              </a:rPr>
-              <a:t>Agent logs in</a:t>
-            </a:r>
-            <a:endParaRPr lang="en-US" sz="1600" dirty="0"/>
-          </a:p>
-          <a:p>
-            <a:pPr marL="203200" indent="-203200">
-              <a:spcAft>
-                <a:spcPts val="600"/>
-              </a:spcAft>
-              <a:buSzPct val="100000"/>
-              <a:buChar char="•"/>
-            </a:pPr>
-            <a:r>
-              <a:rPr lang="en-US" sz="1600" dirty="0">
-                <a:solidFill>
-                  <a:schemeClr val="tx1"/>
-                </a:solidFill>
-              </a:rPr>
-              <a:t>Opens escalated ticket queue</a:t>
-            </a:r>
-            <a:endParaRPr lang="en-US" sz="1600" dirty="0"/>
-          </a:p>
-          <a:p>
-            <a:pPr marL="203200" indent="-203200">
-              <a:spcAft>
-                <a:spcPts val="600"/>
-              </a:spcAft>
-              <a:buSzPct val="100000"/>
-              <a:buChar char="•"/>
-            </a:pPr>
-            <a:r>
-              <a:rPr lang="en-US" sz="1600" dirty="0">
-                <a:solidFill>
-                  <a:schemeClr val="tx1"/>
-                </a:solidFill>
-              </a:rPr>
-              <a:t>Reviews ticket details</a:t>
-            </a:r>
-            <a:endParaRPr lang="en-US" sz="1600" dirty="0"/>
-          </a:p>
-          <a:p>
-            <a:pPr marL="203200" indent="-203200">
-              <a:spcAft>
-                <a:spcPts val="600"/>
-              </a:spcAft>
-              <a:buSzPct val="100000"/>
-              <a:buChar char="•"/>
-            </a:pPr>
-            <a:r>
-              <a:rPr lang="en-US" sz="1600" dirty="0">
-                <a:solidFill>
-                  <a:schemeClr val="tx1"/>
-                </a:solidFill>
-              </a:rPr>
-              <a:t>Reviews customer conversation</a:t>
-            </a:r>
-            <a:endParaRPr lang="en-US" sz="1600" dirty="0"/>
-          </a:p>
-          <a:p>
-            <a:pPr marL="203200" indent="-203200">
-              <a:spcAft>
-                <a:spcPts val="600"/>
-              </a:spcAft>
-              <a:buSzPct val="100000"/>
-              <a:buChar char="•"/>
-            </a:pPr>
-            <a:r>
-              <a:rPr lang="en-US" sz="1600" dirty="0">
-                <a:solidFill>
-                  <a:schemeClr val="tx1"/>
-                </a:solidFill>
-              </a:rPr>
-              <a:t>Assigns the ticket</a:t>
-            </a:r>
-            <a:endParaRPr lang="en-US" sz="1600" dirty="0"/>
-          </a:p>
-          <a:p>
-            <a:pPr marL="203200" indent="-203200">
-              <a:spcAft>
-                <a:spcPts val="600"/>
-              </a:spcAft>
-              <a:buSzPct val="100000"/>
-              <a:buChar char="•"/>
-            </a:pPr>
-            <a:r>
-              <a:rPr lang="en-US" sz="1600" dirty="0">
-                <a:solidFill>
-                  <a:schemeClr val="tx1"/>
-                </a:solidFill>
-              </a:rPr>
-              <a:t>Responds to the customer</a:t>
-            </a:r>
-            <a:endParaRPr lang="en-US" sz="1600" dirty="0"/>
-          </a:p>
-          <a:p>
-            <a:pPr marL="203200" indent="-203200">
-              <a:spcAft>
-                <a:spcPts val="600"/>
-              </a:spcAft>
-              <a:buSzPct val="100000"/>
-              <a:buChar char="•"/>
-            </a:pPr>
-            <a:r>
-              <a:rPr lang="en-US" sz="1600" dirty="0">
-                <a:solidFill>
-                  <a:schemeClr val="tx1"/>
-                </a:solidFill>
-              </a:rPr>
-              <a:t>Updates ticket status</a:t>
-            </a:r>
-            <a:endParaRPr lang="en-US" sz="1600" dirty="0"/>
-          </a:p>
-          <a:p>
-            <a:pPr marL="203200" indent="-203200">
-              <a:spcAft>
-                <a:spcPts val="600"/>
-              </a:spcAft>
-              <a:buSzPct val="100000"/>
-              <a:buChar char="•"/>
-            </a:pPr>
-            <a:r>
-              <a:rPr lang="en-US" sz="1600" dirty="0">
-                <a:solidFill>
-                  <a:schemeClr val="tx1"/>
-                </a:solidFill>
-              </a:rPr>
-              <a:t>Resolves the issue</a:t>
-            </a:r>
-            <a:endParaRPr lang="en-US" sz="1600" dirty="0"/>
-          </a:p>
-        </p:txBody>
-      </p:sp>
-      <p:sp>
-        <p:nvSpPr>
-          <p:cNvPr id="25" name="Slide Number Placeholder 0"/>
-          <p:cNvSpPr>
-            <a:spLocks noGrp="1"/>
-          </p:cNvSpPr>
-          <p:nvPr>
-            <p:ph type="sldNum" sz="quarter" idx="4294967295"/>
-          </p:nvPr>
-        </p:nvSpPr>
-        <p:spPr>
-          <a:xfrm>
-            <a:off x="10972800" y="6446520"/>
-            <a:ext cx="667512" cy="256032"/>
-          </a:xfrm>
-          <a:prstGeom prst="rect">
-            <a:avLst/>
-          </a:prstGeom>
-          <a:extLst>
-            <a:ext uri="{C572A759-6A51-4108-AA02-DFA0A04FC94B}">
-              <ma14:wrappingTextBoxFlag xmlns:ma14="http://schemas.microsoft.com/office/mac/drawingml/2011/main" xmlns="" val="0"/>
-            </a:ext>
-          </a:extLst>
-        </p:spPr>
-        <p:txBody>
-          <a:bodyPr/>
-          <a:lstStyle>
-            <a:lvl1pPr>
-              <a:defRPr sz="1000">
-                <a:solidFill>
-                  <a:schemeClr val="accent6"/>
-                </a:solidFill>
-              </a:defRPr>
-            </a:lvl1pPr>
-          </a:lstStyle>
-          <a:p>
-            <a:pPr algn="r"/>
-            <a:fld id="{F7021451-1387-4CA6-816F-3879F97B5CBC}" type="slidenum">
-              <a:rPr lang="en-US" b="0"/>
-              <a:t>15</a:t>
-            </a:fld>
-            <a:endParaRPr lang="en-US"/>
-          </a:p>
-        </p:txBody>
-      </p:sp>
-      <p:pic>
-        <p:nvPicPr>
-          <p:cNvPr id="11" name="Content Placeholder 7">
-            <a:extLst>
-              <a:ext uri="{FF2B5EF4-FFF2-40B4-BE49-F238E27FC236}">
-                <a16:creationId xmlns:a16="http://schemas.microsoft.com/office/drawing/2014/main" id="{BB6AF832-B0AC-0B37-8B7D-3B87AD93730A}"/>
-              </a:ext>
-            </a:extLst>
-          </p:cNvPr>
-          <p:cNvPicPr>
-            <a:picLocks noChangeAspect="1"/>
-          </p:cNvPicPr>
-          <p:nvPr/>
-        </p:nvPicPr>
-        <p:blipFill>
-          <a:blip r:embed="rId4"/>
-          <a:stretch>
-            <a:fillRect/>
-          </a:stretch>
-        </p:blipFill>
-        <p:spPr>
-          <a:xfrm>
-            <a:off x="159026" y="1371600"/>
-            <a:ext cx="7063409" cy="4512365"/>
-          </a:xfrm>
-          <a:prstGeom prst="rect">
-            <a:avLst/>
-          </a:prstGeom>
-        </p:spPr>
-      </p:pic>
-    </p:spTree>
-  </p:cSld>
-  <p:clrMapOvr>
-    <a:masterClrMapping/>
-  </p:clrMapOvr>
-</p:sld>
-</file>
-
-<file path=ppt/slides/slide16.xml><?xml version="1.0" encoding="utf-8"?>
-<p:sld xmlns:a="http://schemas.openxmlformats.org/drawingml/2006/main" xmlns:r="http://schemas.openxmlformats.org/officeDocument/2006/relationships" xmlns:p="http://schemas.openxmlformats.org/presentationml/2006/main">
-  <p:cSld name="Slide 16">
-    <p:spTree>
-      <p:nvGrpSpPr>
-        <p:cNvPr id="1" name=""/>
-        <p:cNvGrpSpPr/>
-        <p:nvPr/>
-      </p:nvGrpSpPr>
-      <p:grpSpPr>
-        <a:xfrm>
-          <a:off x="0" y="0"/>
-          <a:ext cx="0" cy="0"/>
-          <a:chOff x="0" y="0"/>
-          <a:chExt cx="0" cy="0"/>
-        </a:xfrm>
-      </p:grpSpPr>
-      <p:sp>
-        <p:nvSpPr>
-          <p:cNvPr id="2" name="Text 0"/>
-          <p:cNvSpPr>
-            <a:spLocks noGrp="1"/>
-          </p:cNvSpPr>
-          <p:nvPr>
-            <p:ph type="title" idx="100" hasCustomPrompt="1"/>
-          </p:nvPr>
-        </p:nvSpPr>
-        <p:spPr>
-          <a:xfrm>
-            <a:off x="548640" y="365760"/>
-            <a:ext cx="11094415" cy="777240"/>
-          </a:xfrm>
-          <a:prstGeom prst="rect">
-            <a:avLst/>
-          </a:prstGeom>
-          <a:noFill/>
-          <a:ln/>
-        </p:spPr>
-        <p:txBody>
-          <a:bodyPr wrap="square" lIns="0" tIns="0" rIns="0" bIns="0" rtlCol="0" anchor="ctr"/>
-          <a:lstStyle/>
-          <a:p>
-            <a:pPr marL="0" indent="0" algn="l">
-              <a:buNone/>
-            </a:pPr>
-            <a:r>
-              <a:rPr lang="en-US" sz="3400" b="1" dirty="0">
-                <a:solidFill>
-                  <a:schemeClr val="tx2"/>
-                </a:solidFill>
-              </a:rPr>
-              <a:t>Live Demonstration: Administrator</a:t>
-            </a:r>
-            <a:endParaRPr lang="en-US" sz="3400" dirty="0"/>
-          </a:p>
-        </p:txBody>
-      </p:sp>
-      <p:sp>
-        <p:nvSpPr>
-          <p:cNvPr id="3" name="Admin workflow card"/>
-          <p:cNvSpPr/>
-          <p:nvPr/>
-        </p:nvSpPr>
-        <p:spPr>
-          <a:xfrm>
-            <a:off x="548640" y="1371600"/>
-            <a:ext cx="3611880" cy="4892040"/>
-          </a:xfrm>
-          <a:prstGeom prst="roundRect">
-            <a:avLst>
-              <a:gd name="adj" fmla="val 2532"/>
-            </a:avLst>
-          </a:prstGeom>
-          <a:solidFill>
-            <a:schemeClr val="bg1"/>
-          </a:solidFill>
-          <a:ln/>
-          <a:effectLst>
-            <a:outerShdw blurRad="127000" dist="25400" dir="5400000" algn="bl" rotWithShape="0">
-              <a:srgbClr val="0B1F33">
-                <a:alpha val="10000"/>
-              </a:srgbClr>
-            </a:outerShdw>
-          </a:effectLst>
-        </p:spPr>
-        <p:txBody>
-          <a:bodyPr/>
-          <a:lstStyle/>
-          <a:p>
-            <a:endParaRPr lang="en-AU"/>
-          </a:p>
-        </p:txBody>
-      </p:sp>
-      <p:sp>
-        <p:nvSpPr>
-          <p:cNvPr id="4" name="Admin workflow badge"/>
-          <p:cNvSpPr/>
-          <p:nvPr/>
-        </p:nvSpPr>
-        <p:spPr>
-          <a:xfrm>
-            <a:off x="822960" y="1554480"/>
-            <a:ext cx="502920" cy="502920"/>
-          </a:xfrm>
-          <a:prstGeom prst="ellipse">
-            <a:avLst/>
-          </a:prstGeom>
-          <a:solidFill>
-            <a:schemeClr val="accent2"/>
-          </a:solidFill>
-          <a:ln/>
-        </p:spPr>
-        <p:txBody>
-          <a:bodyPr/>
-          <a:lstStyle/>
-          <a:p>
-            <a:endParaRPr lang="en-AU"/>
-          </a:p>
-        </p:txBody>
-      </p:sp>
-      <p:pic>
-        <p:nvPicPr>
-          <p:cNvPr id="5" name="Admin workflow icon" descr="Admin workflow"/>
-          <p:cNvPicPr>
-            <a:picLocks noChangeAspect="1"/>
-          </p:cNvPicPr>
-          <p:nvPr/>
-        </p:nvPicPr>
-        <p:blipFill>
-          <a:blip r:embed="rId3"/>
-          <a:stretch>
-            <a:fillRect/>
-          </a:stretch>
-        </p:blipFill>
-        <p:spPr>
-          <a:xfrm>
-            <a:off x="958748" y="1690268"/>
-            <a:ext cx="231343" cy="231343"/>
-          </a:xfrm>
-          <a:prstGeom prst="rect">
-            <a:avLst/>
-          </a:prstGeom>
-        </p:spPr>
-      </p:pic>
-      <p:sp>
-        <p:nvSpPr>
-          <p:cNvPr id="6" name="Admin workflow heading"/>
-          <p:cNvSpPr txBox="1"/>
-          <p:nvPr/>
-        </p:nvSpPr>
-        <p:spPr>
-          <a:xfrm>
-            <a:off x="1508760" y="1554480"/>
-            <a:ext cx="4206240" cy="502920"/>
-          </a:xfrm>
-          <a:prstGeom prst="rect">
-            <a:avLst/>
-          </a:prstGeom>
-          <a:noFill/>
-          <a:ln/>
-        </p:spPr>
-        <p:txBody>
-          <a:bodyPr wrap="square" lIns="0" tIns="0" rIns="0" bIns="0" rtlCol="0" anchor="ctr"/>
-          <a:lstStyle/>
-          <a:p>
-            <a:pPr marL="0" indent="0">
-              <a:buNone/>
-            </a:pPr>
-            <a:r>
-              <a:rPr lang="en-US" sz="2000" b="1" dirty="0">
-                <a:solidFill>
-                  <a:schemeClr val="tx2"/>
-                </a:solidFill>
-              </a:rPr>
-              <a:t>Admin Workflow</a:t>
-            </a:r>
-            <a:endParaRPr lang="en-US" sz="2000" dirty="0"/>
-          </a:p>
-        </p:txBody>
-      </p:sp>
-      <p:sp>
-        <p:nvSpPr>
-          <p:cNvPr id="7" name="Text 4"/>
-          <p:cNvSpPr txBox="1"/>
-          <p:nvPr/>
-        </p:nvSpPr>
-        <p:spPr>
-          <a:xfrm>
-            <a:off x="822960" y="2240280"/>
-            <a:ext cx="3108960" cy="274320"/>
-          </a:xfrm>
-          <a:prstGeom prst="rect">
-            <a:avLst/>
-          </a:prstGeom>
-          <a:noFill/>
-          <a:ln/>
-        </p:spPr>
-        <p:txBody>
-          <a:bodyPr wrap="square" lIns="0" tIns="0" rIns="0" bIns="0" rtlCol="0" anchor="t"/>
-          <a:lstStyle/>
-          <a:p>
-            <a:pPr marL="0" indent="0">
-              <a:buNone/>
-            </a:pPr>
-            <a:r>
-              <a:rPr lang="en-US" sz="1600" dirty="0">
-                <a:solidFill>
-                  <a:schemeClr val="tx1"/>
-                </a:solidFill>
-              </a:rPr>
-              <a:t>The Admin interface provides:</a:t>
-            </a:r>
-            <a:endParaRPr lang="en-US" sz="1600" dirty="0"/>
-          </a:p>
-        </p:txBody>
-      </p:sp>
-      <p:sp>
-        <p:nvSpPr>
-          <p:cNvPr id="8" name="Text 5"/>
-          <p:cNvSpPr txBox="1"/>
-          <p:nvPr/>
-        </p:nvSpPr>
-        <p:spPr>
-          <a:xfrm>
-            <a:off x="822960" y="2651760"/>
-            <a:ext cx="3108960" cy="3474720"/>
-          </a:xfrm>
-          <a:prstGeom prst="rect">
-            <a:avLst/>
-          </a:prstGeom>
-          <a:noFill/>
-          <a:ln/>
-        </p:spPr>
-        <p:txBody>
-          <a:bodyPr wrap="square" lIns="0" tIns="0" rIns="0" bIns="0" rtlCol="0" anchor="t"/>
-          <a:lstStyle/>
-          <a:p>
-            <a:pPr marL="0" indent="0">
-              <a:buNone/>
-            </a:pPr>
-            <a:r>
-              <a:rPr lang="en-US" sz="1500" b="1" dirty="0">
-                <a:solidFill>
-                  <a:schemeClr val="accent1"/>
-                </a:solidFill>
-              </a:rPr>
-              <a:t>User Management</a:t>
-            </a:r>
-            <a:endParaRPr lang="en-US" sz="1400" dirty="0"/>
-          </a:p>
-          <a:p>
-            <a:pPr marL="685800" lvl="1" indent="-228600">
-              <a:buFont typeface="Arial" panose="020B0604020202020204" pitchFamily="34" charset="0"/>
-              <a:buChar char="•"/>
-            </a:pPr>
-            <a:r>
-              <a:rPr lang="en-AU" sz="1400" dirty="0"/>
-              <a:t>View users</a:t>
-            </a:r>
-          </a:p>
-          <a:p>
-            <a:pPr marL="685800" lvl="1" indent="-228600">
-              <a:buFont typeface="Arial" panose="020B0604020202020204" pitchFamily="34" charset="0"/>
-              <a:buChar char="•"/>
-            </a:pPr>
-            <a:r>
-              <a:rPr lang="en-AU" sz="1400" dirty="0"/>
-              <a:t>Create users</a:t>
-            </a:r>
-          </a:p>
-          <a:p>
-            <a:pPr marL="685800" lvl="1" indent="-228600">
-              <a:buFont typeface="Arial" panose="020B0604020202020204" pitchFamily="34" charset="0"/>
-              <a:buChar char="•"/>
-            </a:pPr>
-            <a:r>
-              <a:rPr lang="en-AU" sz="1400" dirty="0"/>
-              <a:t>Update roles</a:t>
-            </a:r>
-          </a:p>
-          <a:p>
-            <a:pPr marL="685800" lvl="1" indent="-228600">
-              <a:buFont typeface="Arial" panose="020B0604020202020204" pitchFamily="34" charset="0"/>
-              <a:buChar char="•"/>
-            </a:pPr>
-            <a:r>
-              <a:rPr lang="en-AU" sz="1400" dirty="0"/>
-              <a:t>Manage account status</a:t>
-            </a:r>
-          </a:p>
-          <a:p>
-            <a:pPr marL="0" indent="0">
-              <a:buNone/>
-            </a:pPr>
-            <a:r>
-              <a:rPr lang="en-US" sz="1500" b="1" dirty="0">
-                <a:solidFill>
-                  <a:schemeClr val="accent1"/>
-                </a:solidFill>
-              </a:rPr>
-              <a:t>Knowledge Base</a:t>
-            </a:r>
-            <a:endParaRPr lang="en-US" sz="1400" dirty="0"/>
-          </a:p>
-          <a:p>
-            <a:pPr marL="685800" lvl="1" indent="-228600">
-              <a:buFont typeface="Arial" panose="020B0604020202020204" pitchFamily="34" charset="0"/>
-              <a:buChar char="•"/>
-            </a:pPr>
-            <a:r>
-              <a:rPr lang="en-AU" sz="1400" dirty="0"/>
-              <a:t>Create entries</a:t>
-            </a:r>
-          </a:p>
-          <a:p>
-            <a:pPr marL="685800" lvl="1" indent="-228600">
-              <a:buFont typeface="Arial" panose="020B0604020202020204" pitchFamily="34" charset="0"/>
-              <a:buChar char="•"/>
-            </a:pPr>
-            <a:r>
-              <a:rPr lang="en-AU" sz="1400" dirty="0"/>
-              <a:t>Update entries</a:t>
-            </a:r>
-          </a:p>
-          <a:p>
-            <a:pPr marL="685800" lvl="1" indent="-228600">
-              <a:buFont typeface="Arial" panose="020B0604020202020204" pitchFamily="34" charset="0"/>
-              <a:buChar char="•"/>
-            </a:pPr>
-            <a:r>
-              <a:rPr lang="en-AU" sz="1400" dirty="0"/>
-              <a:t>Delete entries</a:t>
-            </a:r>
-          </a:p>
-          <a:p>
-            <a:pPr marL="0" indent="0">
-              <a:buNone/>
-            </a:pPr>
-            <a:r>
-              <a:rPr lang="en-US" sz="1500" b="1" dirty="0">
-                <a:solidFill>
-                  <a:schemeClr val="accent1"/>
-                </a:solidFill>
-              </a:rPr>
-              <a:t>Analytics</a:t>
-            </a:r>
-            <a:endParaRPr lang="en-US" sz="1400" dirty="0"/>
-          </a:p>
-          <a:p>
-            <a:pPr marL="685800" lvl="1" indent="-228600">
-              <a:buFont typeface="Arial" panose="020B0604020202020204" pitchFamily="34" charset="0"/>
-              <a:buChar char="•"/>
-            </a:pPr>
-            <a:r>
-              <a:rPr lang="en-AU" sz="1400" dirty="0"/>
-              <a:t>Ticket statistics</a:t>
-            </a:r>
-          </a:p>
-          <a:p>
-            <a:pPr marL="685800" lvl="1" indent="-228600">
-              <a:buFont typeface="Arial" panose="020B0604020202020204" pitchFamily="34" charset="0"/>
-              <a:buChar char="•"/>
-            </a:pPr>
-            <a:r>
-              <a:rPr lang="en-AU" sz="1400" dirty="0"/>
-              <a:t>Escalation information</a:t>
-            </a:r>
-          </a:p>
-          <a:p>
-            <a:pPr marL="685800" lvl="1" indent="-228600">
-              <a:buFont typeface="Arial" panose="020B0604020202020204" pitchFamily="34" charset="0"/>
-              <a:buChar char="•"/>
-            </a:pPr>
-            <a:r>
-              <a:rPr lang="en-AU" sz="1400" dirty="0"/>
-              <a:t>Support metrics</a:t>
-            </a:r>
-          </a:p>
-          <a:p>
-            <a:pPr marL="0" indent="0">
-              <a:buNone/>
-            </a:pPr>
-            <a:r>
-              <a:rPr lang="en-US" sz="1500" b="1" dirty="0">
-                <a:solidFill>
-                  <a:schemeClr val="accent1"/>
-                </a:solidFill>
-              </a:rPr>
-              <a:t>System Logs</a:t>
-            </a:r>
-            <a:endParaRPr lang="en-US" sz="1400" dirty="0"/>
-          </a:p>
-          <a:p>
-            <a:pPr marL="685800" lvl="1" indent="-228600">
-              <a:buFont typeface="Arial" panose="020B0604020202020204" pitchFamily="34" charset="0"/>
-              <a:buChar char="•"/>
-            </a:pPr>
-            <a:r>
-              <a:rPr lang="en-AU" sz="1400" dirty="0"/>
-              <a:t>Review important application activities</a:t>
-            </a:r>
-          </a:p>
-        </p:txBody>
-      </p:sp>
-      <p:pic>
-        <p:nvPicPr>
-          <p:cNvPr id="10" name="Ticket Queue screenshot" descr="Ticket Queue screenshot"/>
-          <p:cNvPicPr>
-            <a:picLocks noChangeAspect="1"/>
-          </p:cNvPicPr>
-          <p:nvPr/>
-        </p:nvPicPr>
-        <p:blipFill>
-          <a:blip r:embed="rId4"/>
-          <a:stretch>
-            <a:fillRect/>
-          </a:stretch>
-        </p:blipFill>
-        <p:spPr>
-          <a:xfrm>
-            <a:off x="4572000" y="1508760"/>
-            <a:ext cx="3282696" cy="1570361"/>
-          </a:xfrm>
-          <a:prstGeom prst="rect">
-            <a:avLst/>
-          </a:prstGeom>
-        </p:spPr>
-      </p:pic>
-      <p:sp>
-        <p:nvSpPr>
-          <p:cNvPr id="11" name="Text 7"/>
-          <p:cNvSpPr txBox="1"/>
-          <p:nvPr/>
-        </p:nvSpPr>
-        <p:spPr>
-          <a:xfrm>
-            <a:off x="4572000" y="3188849"/>
-            <a:ext cx="3282696" cy="274320"/>
-          </a:xfrm>
-          <a:prstGeom prst="rect">
-            <a:avLst/>
-          </a:prstGeom>
-          <a:noFill/>
-          <a:ln/>
-        </p:spPr>
-        <p:txBody>
-          <a:bodyPr wrap="square" lIns="0" tIns="0" rIns="0" bIns="0" rtlCol="0" anchor="t"/>
-          <a:lstStyle/>
-          <a:p>
-            <a:pPr marL="0" indent="0">
-              <a:buNone/>
-            </a:pPr>
-            <a:r>
-              <a:rPr lang="en-US" sz="1200" b="1" dirty="0">
-                <a:solidFill>
-                  <a:schemeClr val="accent6"/>
-                </a:solidFill>
-              </a:rPr>
-              <a:t>Ticket Queue</a:t>
-            </a:r>
-            <a:endParaRPr lang="en-US" sz="1200" dirty="0"/>
-          </a:p>
-        </p:txBody>
-      </p:sp>
-      <p:pic>
-        <p:nvPicPr>
-          <p:cNvPr id="13" name="Analytics screenshot" descr="Analytics screenshot"/>
-          <p:cNvPicPr>
-            <a:picLocks noChangeAspect="1"/>
-          </p:cNvPicPr>
-          <p:nvPr/>
-        </p:nvPicPr>
-        <p:blipFill>
-          <a:blip r:embed="rId5"/>
-          <a:stretch>
-            <a:fillRect/>
-          </a:stretch>
-        </p:blipFill>
-        <p:spPr>
-          <a:xfrm>
-            <a:off x="8220456" y="1508760"/>
-            <a:ext cx="3282696" cy="1567055"/>
-          </a:xfrm>
-          <a:prstGeom prst="rect">
-            <a:avLst/>
-          </a:prstGeom>
-        </p:spPr>
-      </p:pic>
-      <p:sp>
-        <p:nvSpPr>
-          <p:cNvPr id="14" name="Text 9"/>
-          <p:cNvSpPr txBox="1"/>
-          <p:nvPr/>
-        </p:nvSpPr>
-        <p:spPr>
-          <a:xfrm>
-            <a:off x="8220456" y="3185543"/>
-            <a:ext cx="3282696" cy="274320"/>
-          </a:xfrm>
-          <a:prstGeom prst="rect">
-            <a:avLst/>
-          </a:prstGeom>
-          <a:noFill/>
-          <a:ln/>
-        </p:spPr>
-        <p:txBody>
-          <a:bodyPr wrap="square" lIns="0" tIns="0" rIns="0" bIns="0" rtlCol="0" anchor="t"/>
-          <a:lstStyle/>
-          <a:p>
-            <a:pPr marL="0" indent="0">
-              <a:buNone/>
-            </a:pPr>
-            <a:r>
-              <a:rPr lang="en-US" sz="1200" b="1" dirty="0">
-                <a:solidFill>
-                  <a:schemeClr val="accent6"/>
-                </a:solidFill>
-              </a:rPr>
-              <a:t>Analytics</a:t>
-            </a:r>
-            <a:endParaRPr lang="en-US" sz="1200" dirty="0"/>
-          </a:p>
-        </p:txBody>
-      </p:sp>
-      <p:pic>
-        <p:nvPicPr>
-          <p:cNvPr id="16" name="User Management screenshot" descr="User Management screenshot"/>
-          <p:cNvPicPr>
-            <a:picLocks noChangeAspect="1"/>
-          </p:cNvPicPr>
-          <p:nvPr/>
-        </p:nvPicPr>
-        <p:blipFill>
-          <a:blip r:embed="rId6"/>
-          <a:stretch>
-            <a:fillRect/>
-          </a:stretch>
-        </p:blipFill>
-        <p:spPr>
-          <a:xfrm>
-            <a:off x="4572000" y="4069080"/>
-            <a:ext cx="3282696" cy="1574865"/>
-          </a:xfrm>
-          <a:prstGeom prst="rect">
-            <a:avLst/>
-          </a:prstGeom>
-        </p:spPr>
-      </p:pic>
-      <p:sp>
-        <p:nvSpPr>
-          <p:cNvPr id="17" name="Text 11"/>
-          <p:cNvSpPr txBox="1"/>
-          <p:nvPr/>
-        </p:nvSpPr>
-        <p:spPr>
-          <a:xfrm>
-            <a:off x="4572000" y="5753673"/>
-            <a:ext cx="3282696" cy="274320"/>
-          </a:xfrm>
-          <a:prstGeom prst="rect">
-            <a:avLst/>
-          </a:prstGeom>
-          <a:noFill/>
-          <a:ln/>
-        </p:spPr>
-        <p:txBody>
-          <a:bodyPr wrap="square" lIns="0" tIns="0" rIns="0" bIns="0" rtlCol="0" anchor="t"/>
-          <a:lstStyle/>
-          <a:p>
-            <a:pPr marL="0" indent="0">
-              <a:buNone/>
-            </a:pPr>
-            <a:r>
-              <a:rPr lang="en-US" sz="1200" b="1" dirty="0">
-                <a:solidFill>
-                  <a:schemeClr val="accent6"/>
-                </a:solidFill>
-              </a:rPr>
-              <a:t>User Management</a:t>
-            </a:r>
-            <a:endParaRPr lang="en-US" sz="1200" dirty="0"/>
-          </a:p>
-        </p:txBody>
-      </p:sp>
-      <p:pic>
-        <p:nvPicPr>
-          <p:cNvPr id="19" name="System Logs screenshot" descr="System Logs screenshot"/>
-          <p:cNvPicPr>
-            <a:picLocks noChangeAspect="1"/>
-          </p:cNvPicPr>
-          <p:nvPr/>
-        </p:nvPicPr>
-        <p:blipFill>
-          <a:blip r:embed="rId7"/>
-          <a:stretch>
-            <a:fillRect/>
-          </a:stretch>
-        </p:blipFill>
-        <p:spPr>
-          <a:xfrm>
-            <a:off x="8220456" y="4069080"/>
-            <a:ext cx="3282696" cy="1569910"/>
-          </a:xfrm>
-          <a:prstGeom prst="rect">
-            <a:avLst/>
-          </a:prstGeom>
-        </p:spPr>
-      </p:pic>
-      <p:sp>
-        <p:nvSpPr>
-          <p:cNvPr id="20" name="Text 13"/>
-          <p:cNvSpPr txBox="1"/>
-          <p:nvPr/>
-        </p:nvSpPr>
-        <p:spPr>
-          <a:xfrm>
-            <a:off x="8220456" y="5748718"/>
-            <a:ext cx="3282696" cy="274320"/>
-          </a:xfrm>
-          <a:prstGeom prst="rect">
-            <a:avLst/>
-          </a:prstGeom>
-          <a:noFill/>
-          <a:ln/>
-        </p:spPr>
-        <p:txBody>
-          <a:bodyPr wrap="square" lIns="0" tIns="0" rIns="0" bIns="0" rtlCol="0" anchor="t"/>
-          <a:lstStyle/>
-          <a:p>
-            <a:pPr marL="0" indent="0">
-              <a:buNone/>
-            </a:pPr>
-            <a:r>
-              <a:rPr lang="en-US" sz="1200" b="1" dirty="0">
-                <a:solidFill>
-                  <a:schemeClr val="accent6"/>
-                </a:solidFill>
-              </a:rPr>
-              <a:t>System Logs</a:t>
-            </a:r>
-            <a:endParaRPr lang="en-US" sz="1200" dirty="0"/>
-          </a:p>
-        </p:txBody>
-      </p:sp>
-      <p:sp>
-        <p:nvSpPr>
-          <p:cNvPr id="25" name="Slide Number Placeholder 0"/>
-          <p:cNvSpPr>
-            <a:spLocks noGrp="1"/>
-          </p:cNvSpPr>
-          <p:nvPr>
-            <p:ph type="sldNum" sz="quarter" idx="4294967295"/>
-          </p:nvPr>
-        </p:nvSpPr>
-        <p:spPr>
-          <a:xfrm>
-            <a:off x="10972800" y="6446520"/>
-            <a:ext cx="667512" cy="256032"/>
-          </a:xfrm>
-          <a:prstGeom prst="rect">
-            <a:avLst/>
-          </a:prstGeom>
-          <a:extLst>
-            <a:ext uri="{C572A759-6A51-4108-AA02-DFA0A04FC94B}">
-              <ma14:wrappingTextBoxFlag xmlns:ma14="http://schemas.microsoft.com/office/mac/drawingml/2011/main" xmlns="" val="0"/>
+              <ma14:wrappingTextBoxFlag xmlns="" xmlns:ma14="http://schemas.microsoft.com/office/mac/drawingml/2011/main" val="0"/>
             </a:ext>
           </a:extLst>
         </p:spPr>
@@ -8318,7 +8318,7 @@
           </a:prstGeom>
           <a:extLst>
             <a:ext uri="{C572A759-6A51-4108-AA02-DFA0A04FC94B}">
-              <ma14:wrappingTextBoxFlag xmlns:ma14="http://schemas.microsoft.com/office/mac/drawingml/2011/main" xmlns="" val="0"/>
+              <ma14:wrappingTextBoxFlag xmlns="" xmlns:ma14="http://schemas.microsoft.com/office/mac/drawingml/2011/main" val="0"/>
             </a:ext>
           </a:extLst>
         </p:spPr>
@@ -9063,7 +9063,7 @@
           </a:prstGeom>
           <a:extLst>
             <a:ext uri="{C572A759-6A51-4108-AA02-DFA0A04FC94B}">
-              <ma14:wrappingTextBoxFlag xmlns:ma14="http://schemas.microsoft.com/office/mac/drawingml/2011/main" xmlns="" val="0"/>
+              <ma14:wrappingTextBoxFlag xmlns="" xmlns:ma14="http://schemas.microsoft.com/office/mac/drawingml/2011/main" val="0"/>
             </a:ext>
           </a:extLst>
         </p:spPr>
@@ -10034,7 +10034,7 @@
           </a:prstGeom>
           <a:extLst>
             <a:ext uri="{C572A759-6A51-4108-AA02-DFA0A04FC94B}">
-              <ma14:wrappingTextBoxFlag xmlns:ma14="http://schemas.microsoft.com/office/mac/drawingml/2011/main" xmlns="" val="0"/>
+              <ma14:wrappingTextBoxFlag xmlns="" xmlns:ma14="http://schemas.microsoft.com/office/mac/drawingml/2011/main" val="0"/>
             </a:ext>
           </a:extLst>
         </p:spPr>
@@ -10802,7 +10802,7 @@
           </a:prstGeom>
           <a:extLst>
             <a:ext uri="{C572A759-6A51-4108-AA02-DFA0A04FC94B}">
-              <ma14:wrappingTextBoxFlag xmlns:ma14="http://schemas.microsoft.com/office/mac/drawingml/2011/main" xmlns="" val="0"/>
+              <ma14:wrappingTextBoxFlag xmlns="" xmlns:ma14="http://schemas.microsoft.com/office/mac/drawingml/2011/main" val="0"/>
             </a:ext>
           </a:extLst>
         </p:spPr>
@@ -11974,7 +11974,7 @@
           </a:prstGeom>
           <a:extLst>
             <a:ext uri="{C572A759-6A51-4108-AA02-DFA0A04FC94B}">
-              <ma14:wrappingTextBoxFlag xmlns:ma14="http://schemas.microsoft.com/office/mac/drawingml/2011/main" xmlns="" val="0"/>
+              <ma14:wrappingTextBoxFlag xmlns="" xmlns:ma14="http://schemas.microsoft.com/office/mac/drawingml/2011/main" val="0"/>
             </a:ext>
           </a:extLst>
         </p:spPr>
@@ -13239,7 +13239,7 @@
           </a:prstGeom>
           <a:extLst>
             <a:ext uri="{C572A759-6A51-4108-AA02-DFA0A04FC94B}">
-              <ma14:wrappingTextBoxFlag xmlns:ma14="http://schemas.microsoft.com/office/mac/drawingml/2011/main" xmlns="" val="0"/>
+              <ma14:wrappingTextBoxFlag xmlns="" xmlns:ma14="http://schemas.microsoft.com/office/mac/drawingml/2011/main" val="0"/>
             </a:ext>
           </a:extLst>
         </p:spPr>
@@ -14253,7 +14253,7 @@
           </a:prstGeom>
           <a:extLst>
             <a:ext uri="{C572A759-6A51-4108-AA02-DFA0A04FC94B}">
-              <ma14:wrappingTextBoxFlag xmlns:ma14="http://schemas.microsoft.com/office/mac/drawingml/2011/main" xmlns="" val="0"/>
+              <ma14:wrappingTextBoxFlag xmlns="" xmlns:ma14="http://schemas.microsoft.com/office/mac/drawingml/2011/main" val="0"/>
             </a:ext>
           </a:extLst>
         </p:spPr>
@@ -15069,7 +15069,7 @@
           </a:prstGeom>
           <a:extLst>
             <a:ext uri="{C572A759-6A51-4108-AA02-DFA0A04FC94B}">
-              <ma14:wrappingTextBoxFlag xmlns:ma14="http://schemas.microsoft.com/office/mac/drawingml/2011/main" xmlns="" val="0"/>
+              <ma14:wrappingTextBoxFlag xmlns="" xmlns:ma14="http://schemas.microsoft.com/office/mac/drawingml/2011/main" val="0"/>
             </a:ext>
           </a:extLst>
         </p:spPr>
@@ -15938,7 +15938,7 @@
           </a:prstGeom>
           <a:extLst>
             <a:ext uri="{C572A759-6A51-4108-AA02-DFA0A04FC94B}">
-              <ma14:wrappingTextBoxFlag xmlns:ma14="http://schemas.microsoft.com/office/mac/drawingml/2011/main" xmlns="" val="0"/>
+              <ma14:wrappingTextBoxFlag xmlns="" xmlns:ma14="http://schemas.microsoft.com/office/mac/drawingml/2011/main" val="0"/>
             </a:ext>
           </a:extLst>
         </p:spPr>
@@ -16996,7 +16996,7 @@
           </a:prstGeom>
           <a:extLst>
             <a:ext uri="{C572A759-6A51-4108-AA02-DFA0A04FC94B}">
-              <ma14:wrappingTextBoxFlag xmlns:ma14="http://schemas.microsoft.com/office/mac/drawingml/2011/main" xmlns="" val="0"/>
+              <ma14:wrappingTextBoxFlag xmlns="" xmlns:ma14="http://schemas.microsoft.com/office/mac/drawingml/2011/main" val="0"/>
             </a:ext>
           </a:extLst>
         </p:spPr>
@@ -17598,7 +17598,7 @@
           </a:prstGeom>
           <a:extLst>
             <a:ext uri="{C572A759-6A51-4108-AA02-DFA0A04FC94B}">
-              <ma14:wrappingTextBoxFlag xmlns:ma14="http://schemas.microsoft.com/office/mac/drawingml/2011/main" xmlns="" val="0"/>
+              <ma14:wrappingTextBoxFlag xmlns="" xmlns:ma14="http://schemas.microsoft.com/office/mac/drawingml/2011/main" val="0"/>
             </a:ext>
           </a:extLst>
         </p:spPr>
@@ -19388,7 +19388,7 @@
           </a:prstGeom>
           <a:extLst>
             <a:ext uri="{C572A759-6A51-4108-AA02-DFA0A04FC94B}">
-              <ma14:wrappingTextBoxFlag xmlns:ma14="http://schemas.microsoft.com/office/mac/drawingml/2011/main" xmlns="" val="0"/>
+              <ma14:wrappingTextBoxFlag xmlns="" xmlns:ma14="http://schemas.microsoft.com/office/mac/drawingml/2011/main" val="0"/>
             </a:ext>
           </a:extLst>
         </p:spPr>
